--- a/Aula12_Acoes_Ligadas_a_Categorias/Aula12_Teoria.pptx
+++ b/Aula12_Acoes_Ligadas_a_Categorias/Aula12_Teoria.pptx
@@ -9,7 +9,12 @@
     <p:sldId id="257" r:id="rId3"/>
     <p:sldId id="258" r:id="rId4"/>
     <p:sldId id="259" r:id="rId5"/>
+    <p:sldId id="262" r:id="rId13"/>
+    <p:sldId id="263" r:id="rId14"/>
+    <p:sldId id="264" r:id="rId15"/>
+    <p:sldId id="265" r:id="rId16"/>
     <p:sldId id="260" r:id="rId6"/>
+    <p:sldId id="261" r:id="rId12"/>
   </p:sldIdLst>
   <p:notesMasterIdLst>
     <p:notesMasterId r:id="rId7"/>
@@ -1613,6 +1618,617 @@
 </p:sld>
 </file>
 
+<file path=ppt/slides/slide10.xml><?xml version="1.0" encoding="utf-8"?>
+<p:sld xmlns:a="http://schemas.openxmlformats.org/drawingml/2006/main" xmlns:r="http://schemas.openxmlformats.org/officeDocument/2006/relationships" xmlns:p="http://schemas.openxmlformats.org/presentationml/2006/main">
+  <p:cSld name="Tarefa">
+    <p:bg>
+      <p:bgPr>
+        <a:solidFill>
+          <a:srgbClr val="FFFFFF"/>
+        </a:solidFill>
+      </p:bgPr>
+    </p:bg>
+    <p:spTree>
+      <p:nvGrpSpPr>
+        <p:cNvPr id="1" name=""/>
+        <p:cNvGrpSpPr/>
+        <p:nvPr/>
+      </p:nvGrpSpPr>
+      <p:grpSpPr>
+        <a:xfrm>
+          <a:off x="0" y="0"/>
+          <a:ext cx="0" cy="0"/>
+          <a:chOff x="0" y="0"/>
+          <a:chExt cx="0" cy="0"/>
+        </a:xfrm>
+      </p:grpSpPr>
+      <p:sp>
+        <p:nvSpPr>
+          <p:cNvPr id="900" name="Kicker"/>
+          <p:cNvSpPr/>
+          <p:nvPr/>
+        </p:nvSpPr>
+        <p:spPr>
+          <a:xfrm>
+            <a:off x="548640" y="411480"/>
+            <a:ext cx="5486400" cy="320040"/>
+          </a:xfrm>
+          <a:prstGeom prst="rect">
+            <a:avLst/>
+          </a:prstGeom>
+          <a:noFill/>
+          <a:ln/>
+        </p:spPr>
+        <p:txBody>
+          <a:bodyPr wrap="square" lIns="0" tIns="0" rIns="0" bIns="0" rtlCol="0" anchor="ctr"/>
+          <a:lstStyle/>
+          <a:p>
+            <a:pPr indent="0" marL="0">
+              <a:buNone/>
+            </a:pPr>
+            <a:r>
+              <a:rPr lang="pt-BR" sz="1200" b="1" spc="200" kern="0" dirty="0">
+                <a:solidFill>
+                  <a:srgbClr val="E8963C"/>
+                </a:solidFill>
+                <a:latin typeface="Calibri" pitchFamily="34" charset="0"/>
+                <a:ea typeface="Calibri" pitchFamily="34" charset="-122"/>
+                <a:cs typeface="Calibri" pitchFamily="34" charset="-120"/>
+              </a:rPr>
+              <a:t>TAREFA 12.3</a:t>
+            </a:r>
+            <a:endParaRPr lang="pt-BR" sz="1200" dirty="0"/>
+          </a:p>
+        </p:txBody>
+      </p:sp>
+      <p:sp>
+        <p:nvSpPr>
+          <p:cNvPr id="901" name="Titulo"/>
+          <p:cNvSpPr/>
+          <p:nvPr/>
+        </p:nvSpPr>
+        <p:spPr>
+          <a:xfrm>
+            <a:off x="548640" y="749808"/>
+            <a:ext cx="10789920" cy="868680"/>
+          </a:xfrm>
+          <a:prstGeom prst="rect">
+            <a:avLst/>
+          </a:prstGeom>
+          <a:noFill/>
+          <a:ln/>
+        </p:spPr>
+        <p:txBody>
+          <a:bodyPr wrap="square" lIns="0" tIns="0" rIns="0" bIns="0" rtlCol="0" anchor="ctr"/>
+          <a:lstStyle/>
+          <a:p>
+            <a:pPr indent="0" marL="0">
+              <a:buNone/>
+            </a:pPr>
+            <a:r>
+              <a:rPr lang="pt-BR" sz="2500" b="1" kern="0" dirty="0">
+                <a:solidFill>
+                  <a:srgbClr val="1B3A5C"/>
+                </a:solidFill>
+                <a:latin typeface="Cambria" pitchFamily="34" charset="0"/>
+                <a:ea typeface="Cambria" pitchFamily="34" charset="-122"/>
+                <a:cs typeface="Cambria" pitchFamily="34" charset="-120"/>
+              </a:rPr>
+              <a:t>Quando a ação é sempre a mesma, para qualquer tipo?</a:t>
+            </a:r>
+            <a:endParaRPr lang="pt-BR" sz="2500" dirty="0"/>
+          </a:p>
+        </p:txBody>
+      </p:sp>
+      <p:sp>
+        <p:nvSpPr>
+          <p:cNvPr id="902" name="RotuloPluto"/>
+          <p:cNvSpPr/>
+          <p:nvPr/>
+        </p:nvSpPr>
+        <p:spPr>
+          <a:xfrm>
+            <a:off x="548640" y="1783080"/>
+            <a:ext cx="5120640" cy="292608"/>
+          </a:xfrm>
+          <a:prstGeom prst="rect">
+            <a:avLst/>
+          </a:prstGeom>
+          <a:noFill/>
+          <a:ln/>
+        </p:spPr>
+        <p:txBody>
+          <a:bodyPr wrap="square" lIns="0" tIns="0" rIns="0" bIns="0" rtlCol="0" anchor="ctr"/>
+          <a:lstStyle/>
+          <a:p>
+            <a:pPr indent="0" marL="0">
+              <a:buNone/>
+            </a:pPr>
+            <a:r>
+              <a:rPr lang="pt-BR" sz="1100" b="1" spc="100" kern="0" dirty="0">
+                <a:solidFill>
+                  <a:srgbClr val="3A4A5C"/>
+                </a:solidFill>
+                <a:latin typeface="Calibri" pitchFamily="34" charset="0"/>
+                <a:ea typeface="Calibri" pitchFamily="34" charset="-122"/>
+                <a:cs typeface="Calibri" pitchFamily="34" charset="-120"/>
+              </a:rPr>
+              <a:t>NO PLUTO</a:t>
+            </a:r>
+            <a:endParaRPr lang="pt-BR" sz="1100" dirty="0"/>
+          </a:p>
+        </p:txBody>
+      </p:sp>
+      <p:sp>
+        <p:nvSpPr>
+          <p:cNvPr id="903" name="Instrucoes"/>
+          <p:cNvSpPr/>
+          <p:nvPr/>
+        </p:nvSpPr>
+        <p:spPr>
+          <a:xfrm>
+            <a:off x="548640" y="2148840"/>
+            <a:ext cx="5120640" cy="2103120"/>
+          </a:xfrm>
+          <a:prstGeom prst="rect">
+            <a:avLst/>
+          </a:prstGeom>
+          <a:noFill/>
+          <a:ln/>
+        </p:spPr>
+        <p:txBody>
+          <a:bodyPr wrap="square" lIns="0" tIns="0" rIns="0" bIns="0" rtlCol="0" anchor="t"/>
+          <a:lstStyle/>
+          <a:p>
+            <a:pPr indent="-182880" marL="182880">
+              <a:lnSpc>
+                <a:spcPct val="125000"/>
+              </a:lnSpc>
+              <a:spcAft>
+                <a:spcPts val="280"/>
+              </a:spcAft>
+              <a:buFont typeface="Arial"/>
+              <a:buChar char="•"/>
+            </a:pPr>
+            <a:r>
+              <a:rPr lang="pt-BR" sz="1350" dirty="0">
+                <a:solidFill>
+                  <a:srgbClr val="3A4A5C"/>
+                </a:solidFill>
+                <a:latin typeface="Calibri" pitchFamily="34" charset="0"/>
+                <a:ea typeface="Calibri" pitchFamily="34" charset="-122"/>
+                <a:cs typeface="Calibri" pitchFamily="34" charset="-120"/>
+              </a:rPr>
+              <a:t>Escreva uma função contar que funcione para qualquer coleção.</a:t>
+            </a:r>
+            <a:endParaRPr lang="pt-BR" sz="1350" dirty="0"/>
+          </a:p>
+          <a:p>
+            <a:pPr indent="-182880" marL="182880">
+              <a:lnSpc>
+                <a:spcPct val="125000"/>
+              </a:lnSpc>
+              <a:spcAft>
+                <a:spcPts val="280"/>
+              </a:spcAft>
+              <a:buFont typeface="Arial"/>
+              <a:buChar char="•"/>
+            </a:pPr>
+            <a:r>
+              <a:rPr lang="pt-BR" sz="1350" dirty="0">
+                <a:solidFill>
+                  <a:srgbClr val="3A4A5C"/>
+                </a:solidFill>
+                <a:latin typeface="Calibri" pitchFamily="34" charset="0"/>
+                <a:ea typeface="Calibri" pitchFamily="34" charset="-122"/>
+                <a:cs typeface="Calibri" pitchFamily="34" charset="-120"/>
+              </a:rPr>
+              <a:t>Teste com dois tipos diferentes de coleção.</a:t>
+            </a:r>
+            <a:endParaRPr lang="pt-BR" sz="1350" dirty="0"/>
+          </a:p>
+        </p:txBody>
+      </p:sp>
+      <p:sp>
+        <p:nvSpPr>
+          <p:cNvPr id="904" name="CartaoCodigo"/>
+          <p:cNvSpPr/>
+          <p:nvPr/>
+        </p:nvSpPr>
+        <p:spPr>
+          <a:xfrm>
+            <a:off x="5943600" y="1783080"/>
+            <a:ext cx="5669280" cy="2788920"/>
+          </a:xfrm>
+          <a:prstGeom prst="roundRect">
+            <a:avLst>
+              <a:gd name="adj" fmla="val 8000"/>
+            </a:avLst>
+          </a:prstGeom>
+          <a:solidFill>
+            <a:srgbClr val="1B3A5C"/>
+          </a:solidFill>
+          <a:ln>
+            <a:noFill/>
+          </a:ln>
+          <a:effectLst>
+            <a:outerShdw sx="100000" sy="100000" kx="0" ky="0" algn="bl" rotWithShape="0" blurRad="101600" dist="38100" dir="5400000">
+              <a:srgbClr val="44546A">
+                <a:alpha val="35000"/>
+              </a:srgbClr>
+            </a:outerShdw>
+          </a:effectLst>
+        </p:spPr>
+        <p:txBody>
+          <a:bodyPr/>
+          <a:p/>
+        </p:txBody>
+      </p:sp>
+      <p:sp>
+        <p:nvSpPr>
+          <p:cNvPr id="905" name="Codigo"/>
+          <p:cNvSpPr/>
+          <p:nvPr/>
+        </p:nvSpPr>
+        <p:spPr>
+          <a:xfrm>
+            <a:off x="6263640" y="2057400"/>
+            <a:ext cx="5029200" cy="2240280"/>
+          </a:xfrm>
+          <a:prstGeom prst="rect">
+            <a:avLst/>
+          </a:prstGeom>
+          <a:noFill/>
+          <a:ln/>
+        </p:spPr>
+        <p:txBody>
+          <a:bodyPr wrap="square" lIns="0" tIns="0" rIns="0" bIns="0" rtlCol="0" anchor="t"/>
+          <a:lstStyle/>
+          <a:p>
+            <a:pPr indent="0" marL="0">
+              <a:lnSpc>
+                <a:spcPct val="130000"/>
+              </a:lnSpc>
+              <a:buNone/>
+            </a:pPr>
+            <a:r>
+              <a:rPr lang="pt-BR" sz="1300" dirty="0">
+                <a:solidFill>
+                  <a:srgbClr val="E9EEF3"/>
+                </a:solidFill>
+                <a:latin typeface="Courier New" pitchFamily="34" charset="0"/>
+                <a:ea typeface="Courier New" pitchFamily="34" charset="-122"/>
+                <a:cs typeface="Courier New" pitchFamily="34" charset="-120"/>
+              </a:rPr>
+              <a:t>contar(colecao) = length(colecao)</a:t>
+            </a:r>
+            <a:endParaRPr lang="pt-BR" sz="1300" dirty="0"/>
+          </a:p>
+          <a:p>
+            <a:pPr indent="0" marL="0">
+              <a:lnSpc>
+                <a:spcPct val="130000"/>
+              </a:lnSpc>
+              <a:buNone/>
+            </a:pPr>
+            <a:r>
+              <a:rPr lang="pt-BR" sz="1300" dirty="0">
+                <a:solidFill>
+                  <a:srgbClr val="E9EEF3"/>
+                </a:solidFill>
+                <a:latin typeface="Courier New" pitchFamily="34" charset="0"/>
+                <a:ea typeface="Courier New" pitchFamily="34" charset="-122"/>
+                <a:cs typeface="Courier New" pitchFamily="34" charset="-120"/>
+              </a:rPr>
+              <a:t> </a:t>
+            </a:r>
+            <a:endParaRPr lang="pt-BR" sz="1300" dirty="0"/>
+          </a:p>
+          <a:p>
+            <a:pPr indent="0" marL="0">
+              <a:lnSpc>
+                <a:spcPct val="130000"/>
+              </a:lnSpc>
+              <a:buNone/>
+            </a:pPr>
+            <a:r>
+              <a:rPr lang="pt-BR" sz="1300" dirty="0">
+                <a:solidFill>
+                  <a:srgbClr val="E9EEF3"/>
+                </a:solidFill>
+                <a:latin typeface="Courier New" pitchFamily="34" charset="0"/>
+                <a:ea typeface="Courier New" pitchFamily="34" charset="-122"/>
+                <a:cs typeface="Courier New" pitchFamily="34" charset="-120"/>
+              </a:rPr>
+              <a:t>contar([1, 2, 3, 4])</a:t>
+            </a:r>
+            <a:endParaRPr lang="pt-BR" sz="1300" dirty="0"/>
+          </a:p>
+          <a:p>
+            <a:pPr indent="0" marL="0">
+              <a:lnSpc>
+                <a:spcPct val="130000"/>
+              </a:lnSpc>
+              <a:buNone/>
+            </a:pPr>
+            <a:r>
+              <a:rPr lang="pt-BR" sz="1300" dirty="0">
+                <a:solidFill>
+                  <a:srgbClr val="E9EEF3"/>
+                </a:solidFill>
+                <a:latin typeface="Courier New" pitchFamily="34" charset="0"/>
+                <a:ea typeface="Courier New" pitchFamily="34" charset="-122"/>
+                <a:cs typeface="Courier New" pitchFamily="34" charset="-120"/>
+              </a:rPr>
+              <a:t>contar(["maçã", "banana", "pera"])</a:t>
+            </a:r>
+            <a:endParaRPr lang="pt-BR" sz="1300" dirty="0"/>
+          </a:p>
+        </p:txBody>
+      </p:sp>
+      <p:sp>
+        <p:nvSpPr>
+          <p:cNvPr id="906" name="CaixaTraco"/>
+          <p:cNvSpPr/>
+          <p:nvPr/>
+        </p:nvSpPr>
+        <p:spPr>
+          <a:xfrm>
+            <a:off x="5943600" y="4754880"/>
+            <a:ext cx="5669280" cy="1088136"/>
+          </a:xfrm>
+          <a:prstGeom prst="roundRect">
+            <a:avLst>
+              <a:gd name="adj" fmla="val 8000"/>
+            </a:avLst>
+          </a:prstGeom>
+          <a:solidFill>
+            <a:srgbClr val="EEF3F8"/>
+          </a:solidFill>
+          <a:ln>
+            <a:noFill/>
+          </a:ln>
+        </p:spPr>
+        <p:txBody>
+          <a:bodyPr/>
+          <a:p/>
+        </p:txBody>
+      </p:sp>
+      <p:sp>
+        <p:nvSpPr>
+          <p:cNvPr id="907" name="Traco"/>
+          <p:cNvSpPr/>
+          <p:nvPr/>
+        </p:nvSpPr>
+        <p:spPr>
+          <a:xfrm>
+            <a:off x="6217920" y="4892040"/>
+            <a:ext cx="5120640" cy="813816"/>
+          </a:xfrm>
+          <a:prstGeom prst="rect">
+            <a:avLst/>
+          </a:prstGeom>
+          <a:noFill/>
+          <a:ln/>
+        </p:spPr>
+        <p:txBody>
+          <a:bodyPr wrap="square" lIns="0" tIns="0" rIns="0" bIns="0" rtlCol="0" anchor="t"/>
+          <a:lstStyle/>
+          <a:p>
+            <a:pPr indent="0" marL="0">
+              <a:lnSpc>
+                <a:spcPct val="120000"/>
+              </a:lnSpc>
+              <a:buNone/>
+            </a:pPr>
+            <a:r>
+              <a:rPr lang="pt-BR" sz="1250" b="1" dirty="0">
+                <a:solidFill>
+                  <a:srgbClr val="2C7A8C"/>
+                </a:solidFill>
+                <a:latin typeface="Courier New" pitchFamily="34" charset="0"/>
+                <a:cs typeface="Courier New" pitchFamily="34" charset="-120"/>
+              </a:rPr>
+              <a:t>contar([1, 2, 3, 4])</a:t>
+            </a:r>
+            <a:r>
+              <a:rPr lang="pt-BR" sz="1250" dirty="0">
+                <a:solidFill>
+                  <a:srgbClr val="3A4A5C"/>
+                </a:solidFill>
+                <a:latin typeface="Courier New" pitchFamily="34" charset="0"/>
+                <a:cs typeface="Courier New" pitchFamily="34" charset="-120"/>
+              </a:rPr>
+              <a:t>  →  4</a:t>
+            </a:r>
+            <a:endParaRPr lang="pt-BR" sz="1250" dirty="0"/>
+          </a:p>
+          <a:p>
+            <a:pPr indent="0" marL="0">
+              <a:lnSpc>
+                <a:spcPct val="120000"/>
+              </a:lnSpc>
+              <a:buNone/>
+            </a:pPr>
+            <a:r>
+              <a:rPr lang="pt-BR" sz="1250" b="1" dirty="0">
+                <a:solidFill>
+                  <a:srgbClr val="2C7A8C"/>
+                </a:solidFill>
+                <a:latin typeface="Courier New" pitchFamily="34" charset="0"/>
+                <a:cs typeface="Courier New" pitchFamily="34" charset="-120"/>
+              </a:rPr>
+              <a:t>contar(["maçã", ...])</a:t>
+            </a:r>
+            <a:r>
+              <a:rPr lang="pt-BR" sz="1250" dirty="0">
+                <a:solidFill>
+                  <a:srgbClr val="3A4A5C"/>
+                </a:solidFill>
+                <a:latin typeface="Courier New" pitchFamily="34" charset="0"/>
+                <a:cs typeface="Courier New" pitchFamily="34" charset="-120"/>
+              </a:rPr>
+              <a:t>  →  3</a:t>
+            </a:r>
+            <a:endParaRPr lang="pt-BR" sz="1250" dirty="0"/>
+          </a:p>
+        </p:txBody>
+      </p:sp>
+      <p:sp>
+        <p:nvSpPr>
+          <p:cNvPr id="908" name="CaixaNota"/>
+          <p:cNvSpPr/>
+          <p:nvPr/>
+        </p:nvSpPr>
+        <p:spPr>
+          <a:xfrm>
+            <a:off x="548640" y="4343400"/>
+            <a:ext cx="5120640" cy="1234440"/>
+          </a:xfrm>
+          <a:prstGeom prst="roundRect">
+            <a:avLst>
+              <a:gd name="adj" fmla="val 8000"/>
+            </a:avLst>
+          </a:prstGeom>
+          <a:solidFill>
+            <a:srgbClr val="FCF3E7"/>
+          </a:solidFill>
+          <a:ln w="12700">
+            <a:solidFill>
+              <a:srgbClr val="E8963C"/>
+            </a:solidFill>
+          </a:ln>
+        </p:spPr>
+        <p:txBody>
+          <a:bodyPr/>
+          <a:p/>
+        </p:txBody>
+      </p:sp>
+      <p:sp>
+        <p:nvSpPr>
+          <p:cNvPr id="909" name="Nota"/>
+          <p:cNvSpPr/>
+          <p:nvPr/>
+        </p:nvSpPr>
+        <p:spPr>
+          <a:xfrm>
+            <a:off x="777240" y="4343400"/>
+            <a:ext cx="4663440" cy="1234440"/>
+          </a:xfrm>
+          <a:prstGeom prst="rect">
+            <a:avLst/>
+          </a:prstGeom>
+          <a:noFill/>
+          <a:ln/>
+        </p:spPr>
+        <p:txBody>
+          <a:bodyPr wrap="square" lIns="0" tIns="0" rIns="0" bIns="0" rtlCol="0" anchor="ctr"/>
+          <a:lstStyle/>
+          <a:p>
+            <a:pPr indent="0" marL="0">
+              <a:buNone/>
+            </a:pPr>
+            <a:r>
+              <a:rPr lang="pt-BR" sz="1150" i="1" kern="0" dirty="0">
+                <a:solidFill>
+                  <a:srgbClr val="8A5A17"/>
+                </a:solidFill>
+                <a:latin typeface="Calibri" pitchFamily="34" charset="0"/>
+                <a:ea typeface="Calibri" pitchFamily="34" charset="-122"/>
+                <a:cs typeface="Calibri" pitchFamily="34" charset="-120"/>
+              </a:rPr>
+              <a:t>Aqui não existe especialização — um único método genérico já resolve para qualquer coleção. Nem toda ação precisa de vários métodos.</a:t>
+            </a:r>
+            <a:endParaRPr lang="pt-BR" sz="1150" dirty="0"/>
+          </a:p>
+        </p:txBody>
+      </p:sp>
+      <p:sp>
+        <p:nvSpPr>
+          <p:cNvPr id="910" name="Rodape"/>
+          <p:cNvSpPr/>
+          <p:nvPr/>
+        </p:nvSpPr>
+        <p:spPr>
+          <a:xfrm>
+            <a:off x="548640" y="6355080"/>
+            <a:ext cx="7315200" cy="274320"/>
+          </a:xfrm>
+          <a:prstGeom prst="rect">
+            <a:avLst/>
+          </a:prstGeom>
+          <a:noFill/>
+          <a:ln/>
+        </p:spPr>
+        <p:txBody>
+          <a:bodyPr wrap="square" lIns="0" tIns="0" rIns="0" bIns="0" rtlCol="0" anchor="ctr"/>
+          <a:lstStyle/>
+          <a:p>
+            <a:pPr indent="0" marL="0">
+              <a:buNone/>
+            </a:pPr>
+            <a:r>
+              <a:rPr lang="pt-BR" sz="900" kern="0" dirty="0">
+                <a:solidFill>
+                  <a:srgbClr val="9AA5B1"/>
+                </a:solidFill>
+                <a:latin typeface="Calibri" pitchFamily="34" charset="0"/>
+                <a:ea typeface="Calibri" pitchFamily="34" charset="-122"/>
+                <a:cs typeface="Calibri" pitchFamily="34" charset="-120"/>
+              </a:rPr>
+              <a:t>Aula 12 · Ações Ligadas a Categorias</a:t>
+            </a:r>
+            <a:endParaRPr lang="pt-BR" sz="900" dirty="0"/>
+          </a:p>
+        </p:txBody>
+      </p:sp>
+      <p:sp>
+        <p:nvSpPr>
+          <p:cNvPr id="911" name="Pagina"/>
+          <p:cNvSpPr/>
+          <p:nvPr/>
+        </p:nvSpPr>
+        <p:spPr>
+          <a:xfrm>
+            <a:off x="10972800" y="6355080"/>
+            <a:ext cx="731520" cy="274320"/>
+          </a:xfrm>
+          <a:prstGeom prst="rect">
+            <a:avLst/>
+          </a:prstGeom>
+          <a:noFill/>
+          <a:ln/>
+        </p:spPr>
+        <p:txBody>
+          <a:bodyPr wrap="square" lIns="0" tIns="0" rIns="0" bIns="0" rtlCol="0" anchor="ctr"/>
+          <a:lstStyle/>
+          <a:p>
+            <a:pPr algn="r" indent="0" marL="0">
+              <a:buNone/>
+            </a:pPr>
+            <a:r>
+              <a:rPr lang="pt-BR" sz="900" kern="0" dirty="0">
+                <a:solidFill>
+                  <a:srgbClr val="9AA5B1"/>
+                </a:solidFill>
+                <a:latin typeface="Calibri" pitchFamily="34" charset="0"/>
+                <a:ea typeface="Calibri" pitchFamily="34" charset="-122"/>
+                <a:cs typeface="Calibri" pitchFamily="34" charset="-120"/>
+              </a:rPr>
+              <a:t>08</a:t>
+            </a:r>
+            <a:endParaRPr lang="pt-BR" sz="900" dirty="0"/>
+          </a:p>
+        </p:txBody>
+      </p:sp>
+    </p:spTree>
+  </p:cSld>
+  <p:clrMapOvr>
+    <a:masterClrMapping/>
+  </p:clrMapOvr>
+</p:sld>
+</file>
+
 <file path=ppt/slides/slide2.xml><?xml version="1.0" encoding="utf-8"?>
 <p:sld xmlns:a="http://schemas.openxmlformats.org/drawingml/2006/main" xmlns:r="http://schemas.openxmlformats.org/officeDocument/2006/relationships" xmlns:p="http://schemas.openxmlformats.org/presentationml/2006/main">
   <p:cSld name="Slide 2">
@@ -4486,6 +5102,1969 @@
               <a:t>5</a:t>
             </a:r>
             <a:endParaRPr lang="en-US" sz="1000" dirty="0"/>
+          </a:p>
+        </p:txBody>
+      </p:sp>
+    </p:spTree>
+  </p:cSld>
+  <p:clrMapOvr>
+    <a:masterClrMapping/>
+  </p:clrMapOvr>
+</p:sld>
+</file>
+
+<file path=ppt/slides/slide6.xml><?xml version="1.0" encoding="utf-8"?>
+<p:sld xmlns:a="http://schemas.openxmlformats.org/drawingml/2006/main" xmlns:r="http://schemas.openxmlformats.org/officeDocument/2006/relationships" xmlns:p="http://schemas.openxmlformats.org/presentationml/2006/main">
+  <p:cSld name="Referencias">
+    <p:bg>
+      <p:bgPr>
+        <a:solidFill>
+          <a:srgbClr val="12233B"/>
+        </a:solidFill>
+      </p:bgPr>
+    </p:bg>
+    <p:spTree>
+      <p:nvGrpSpPr>
+        <p:cNvPr id="1" name=""/>
+        <p:cNvGrpSpPr/>
+        <p:nvPr/>
+      </p:nvGrpSpPr>
+      <p:grpSpPr>
+        <a:xfrm>
+          <a:off x="0" y="0"/>
+          <a:ext cx="0" cy="0"/>
+          <a:chOff x="0" y="0"/>
+          <a:chExt cx="0" cy="0"/>
+        </a:xfrm>
+      </p:grpSpPr>
+      <p:sp>
+        <p:nvSpPr>
+          <p:cNvPr id="900" name="Kicker"/>
+          <p:cNvSpPr/>
+          <p:nvPr/>
+        </p:nvSpPr>
+        <p:spPr>
+          <a:xfrm>
+            <a:off x="548640" y="548640"/>
+            <a:ext cx="10485120" cy="411480"/>
+          </a:xfrm>
+          <a:prstGeom prst="rect">
+            <a:avLst/>
+          </a:prstGeom>
+          <a:noFill/>
+          <a:ln/>
+        </p:spPr>
+        <p:txBody>
+          <a:bodyPr wrap="square" lIns="0" tIns="0" rIns="0" bIns="0" rtlCol="0" anchor="ctr"/>
+          <a:lstStyle/>
+          <a:p>
+            <a:pPr indent="0" marL="0">
+              <a:buNone/>
+            </a:pPr>
+            <a:r>
+              <a:rPr lang="pt-BR" sz="1200" b="1" spc="200" kern="0" dirty="0">
+                <a:solidFill>
+                  <a:srgbClr val="E8963C"/>
+                </a:solidFill>
+                <a:latin typeface="Calibri" pitchFamily="34" charset="0"/>
+                <a:ea typeface="Calibri" pitchFamily="34" charset="-122"/>
+                <a:cs typeface="Calibri" pitchFamily="34" charset="-120"/>
+              </a:rPr>
+              <a:t>REFERÊNCIAS</a:t>
+            </a:r>
+            <a:endParaRPr lang="pt-BR" sz="1200" dirty="0"/>
+          </a:p>
+        </p:txBody>
+      </p:sp>
+      <p:sp>
+        <p:nvSpPr>
+          <p:cNvPr id="901" name="Titulo"/>
+          <p:cNvSpPr/>
+          <p:nvPr/>
+        </p:nvSpPr>
+        <p:spPr>
+          <a:xfrm>
+            <a:off x="548640" y="1097280"/>
+            <a:ext cx="10485120" cy="754380"/>
+          </a:xfrm>
+          <a:prstGeom prst="rect">
+            <a:avLst/>
+          </a:prstGeom>
+          <a:noFill/>
+          <a:ln/>
+        </p:spPr>
+        <p:txBody>
+          <a:bodyPr wrap="square" lIns="0" tIns="0" rIns="0" bIns="0" rtlCol="0" anchor="ctr"/>
+          <a:lstStyle/>
+          <a:p>
+            <a:pPr indent="0" marL="0">
+              <a:buNone/>
+            </a:pPr>
+            <a:r>
+              <a:rPr lang="pt-BR" sz="3000" b="1" dirty="0">
+                <a:solidFill>
+                  <a:srgbClr val="FFFFFF"/>
+                </a:solidFill>
+                <a:latin typeface="Cambria" pitchFamily="34" charset="0"/>
+                <a:ea typeface="Cambria" pitchFamily="34" charset="-122"/>
+                <a:cs typeface="Cambria" pitchFamily="34" charset="-120"/>
+              </a:rPr>
+              <a:t>Referências</a:t>
+            </a:r>
+            <a:endParaRPr lang="pt-BR" sz="3000" dirty="0"/>
+          </a:p>
+        </p:txBody>
+      </p:sp>
+      <p:sp>
+        <p:nvSpPr>
+          <p:cNvPr id="902" name="Citacoes"/>
+          <p:cNvSpPr/>
+          <p:nvPr/>
+        </p:nvSpPr>
+        <p:spPr>
+          <a:xfrm>
+            <a:off x="548640" y="2057400"/>
+            <a:ext cx="10485120" cy="4114800"/>
+          </a:xfrm>
+          <a:prstGeom prst="rect">
+            <a:avLst/>
+          </a:prstGeom>
+          <a:noFill/>
+          <a:ln/>
+        </p:spPr>
+        <p:txBody>
+          <a:bodyPr wrap="square" lIns="0" tIns="0" rIns="0" bIns="0" rtlCol="0" anchor="t"/>
+          <a:lstStyle/>
+          <a:p>
+            <a:pPr indent="-228600" marL="228600">
+              <a:lnSpc>
+                <a:spcPct val="125000"/>
+              </a:lnSpc>
+              <a:spcAft>
+                <a:spcPts val="320"/>
+              </a:spcAft>
+              <a:buFont typeface="Arial"/>
+              <a:buChar char="•"/>
+            </a:pPr>
+            <a:r>
+              <a:rPr lang="pt-BR" sz="1400" dirty="0">
+                <a:solidFill>
+                  <a:srgbClr val="DCE4EE"/>
+                </a:solidFill>
+                <a:latin typeface="Calibri" pitchFamily="34" charset="0"/>
+                <a:ea typeface="Calibri" pitchFamily="34" charset="-122"/>
+                <a:cs typeface="Calibri" pitchFamily="34" charset="-120"/>
+              </a:rPr>
+              <a:t>RAABE, André; ZORZO, Avelino F.; BLIKSTEIN, Paulo. Computação na Educação Básica: Fundamentos e Experiências. Porto Alegre: Penso, 2020. Ebook. ISBN 9786581334048.</a:t>
+            </a:r>
+            <a:endParaRPr lang="pt-BR" sz="1400" dirty="0"/>
+          </a:p>
+          <a:p>
+            <a:pPr indent="-228600" marL="228600">
+              <a:lnSpc>
+                <a:spcPct val="125000"/>
+              </a:lnSpc>
+              <a:spcAft>
+                <a:spcPts val="320"/>
+              </a:spcAft>
+              <a:buFont typeface="Arial"/>
+              <a:buChar char="•"/>
+            </a:pPr>
+            <a:r>
+              <a:rPr lang="pt-BR" sz="1400" dirty="0">
+                <a:solidFill>
+                  <a:srgbClr val="DCE4EE"/>
+                </a:solidFill>
+                <a:latin typeface="Calibri" pitchFamily="34" charset="0"/>
+                <a:ea typeface="Calibri" pitchFamily="34" charset="-122"/>
+                <a:cs typeface="Calibri" pitchFamily="34" charset="-120"/>
+              </a:rPr>
+              <a:t>RIBEIRO, João Araújo. Introdução à Programação e aos algoritmos. Rio de Janeiro: LTC, 2019. ISBN 978-85-216-3640-3.</a:t>
+            </a:r>
+            <a:endParaRPr lang="pt-BR" sz="1400" dirty="0"/>
+          </a:p>
+          <a:p>
+            <a:pPr indent="-228600" marL="228600">
+              <a:lnSpc>
+                <a:spcPct val="125000"/>
+              </a:lnSpc>
+              <a:spcAft>
+                <a:spcPts val="320"/>
+              </a:spcAft>
+              <a:buFont typeface="Arial"/>
+              <a:buChar char="•"/>
+            </a:pPr>
+            <a:r>
+              <a:rPr lang="pt-BR" sz="1400" dirty="0">
+                <a:solidFill>
+                  <a:srgbClr val="DCE4EE"/>
+                </a:solidFill>
+                <a:latin typeface="Calibri" pitchFamily="34" charset="0"/>
+                <a:ea typeface="Calibri" pitchFamily="34" charset="-122"/>
+                <a:cs typeface="Calibri" pitchFamily="34" charset="-120"/>
+              </a:rPr>
+              <a:t>Felleisen, M.; Findler, R. B.; Flatt, M.; Krishnamurthi, S. How to Design Programs. The MIT Press, 2001. Disponível em: www.htdp.org</a:t>
+            </a:r>
+            <a:endParaRPr lang="pt-BR" sz="1400" dirty="0"/>
+          </a:p>
+        </p:txBody>
+      </p:sp>
+      <p:sp>
+        <p:nvSpPr>
+          <p:cNvPr id="903" name="Rodape"/>
+          <p:cNvSpPr/>
+          <p:nvPr/>
+        </p:nvSpPr>
+        <p:spPr>
+          <a:xfrm>
+            <a:off x="548640" y="6343650"/>
+            <a:ext cx="10485120" cy="342900"/>
+          </a:xfrm>
+          <a:prstGeom prst="rect">
+            <a:avLst/>
+          </a:prstGeom>
+          <a:noFill/>
+          <a:ln/>
+        </p:spPr>
+        <p:txBody>
+          <a:bodyPr wrap="square" lIns="0" tIns="0" rIns="0" bIns="0" rtlCol="0" anchor="ctr"/>
+          <a:lstStyle/>
+          <a:p>
+            <a:pPr indent="0" marL="0">
+              <a:buNone/>
+            </a:pPr>
+            <a:r>
+              <a:rPr lang="pt-BR" sz="900" dirty="0">
+                <a:solidFill>
+                  <a:srgbClr val="8FA3BC"/>
+                </a:solidFill>
+                <a:latin typeface="Calibri" pitchFamily="34" charset="0"/>
+                <a:ea typeface="Calibri" pitchFamily="34" charset="-122"/>
+                <a:cs typeface="Calibri" pitchFamily="34" charset="-120"/>
+              </a:rPr>
+              <a:t>Aula 12 · Ações Ligadas a Categorias</a:t>
+            </a:r>
+            <a:endParaRPr lang="pt-BR" sz="900" dirty="0"/>
+          </a:p>
+        </p:txBody>
+      </p:sp>
+    </p:spTree>
+  </p:cSld>
+  <p:clrMapOvr>
+    <a:masterClrMapping/>
+  </p:clrMapOvr>
+</p:sld>
+</file>
+
+<file path=ppt/slides/slide7.xml><?xml version="1.0" encoding="utf-8"?>
+<p:sld xmlns:a="http://schemas.openxmlformats.org/drawingml/2006/main" xmlns:r="http://schemas.openxmlformats.org/officeDocument/2006/relationships" xmlns:p="http://schemas.openxmlformats.org/presentationml/2006/main">
+  <p:cSld name="Ponte">
+    <p:bg>
+      <p:bgPr>
+        <a:solidFill>
+          <a:srgbClr val="FFFFFF"/>
+        </a:solidFill>
+      </p:bgPr>
+    </p:bg>
+    <p:spTree>
+      <p:nvGrpSpPr>
+        <p:cNvPr id="1" name=""/>
+        <p:cNvGrpSpPr/>
+        <p:nvPr/>
+      </p:nvGrpSpPr>
+      <p:grpSpPr>
+        <a:xfrm>
+          <a:off x="0" y="0"/>
+          <a:ext cx="0" cy="0"/>
+          <a:chOff x="0" y="0"/>
+          <a:chExt cx="0" cy="0"/>
+        </a:xfrm>
+      </p:grpSpPr>
+      <p:sp>
+        <p:nvSpPr>
+          <p:cNvPr id="900" name="Kicker"/>
+          <p:cNvSpPr/>
+          <p:nvPr/>
+        </p:nvSpPr>
+        <p:spPr>
+          <a:xfrm>
+            <a:off x="548640" y="457200"/>
+            <a:ext cx="7315200" cy="320040"/>
+          </a:xfrm>
+          <a:prstGeom prst="rect">
+            <a:avLst/>
+          </a:prstGeom>
+          <a:noFill/>
+          <a:ln/>
+        </p:spPr>
+        <p:txBody>
+          <a:bodyPr wrap="square" lIns="0" tIns="0" rIns="0" bIns="0" rtlCol="0" anchor="ctr"/>
+          <a:lstStyle/>
+          <a:p>
+            <a:pPr indent="0" marL="0">
+              <a:buNone/>
+            </a:pPr>
+            <a:r>
+              <a:rPr lang="pt-BR" sz="1200" b="1" spc="200" kern="0" dirty="0">
+                <a:solidFill>
+                  <a:srgbClr val="E8963C"/>
+                </a:solidFill>
+                <a:latin typeface="Calibri" pitchFamily="34" charset="0"/>
+                <a:ea typeface="Calibri" pitchFamily="34" charset="-122"/>
+                <a:cs typeface="Calibri" pitchFamily="34" charset="-120"/>
+              </a:rPr>
+              <a:t>DA TEORIA À PRÁTICA</a:t>
+            </a:r>
+            <a:endParaRPr lang="pt-BR" sz="1200" dirty="0"/>
+          </a:p>
+        </p:txBody>
+      </p:sp>
+      <p:sp>
+        <p:nvSpPr>
+          <p:cNvPr id="901" name="Titulo"/>
+          <p:cNvSpPr/>
+          <p:nvPr/>
+        </p:nvSpPr>
+        <p:spPr>
+          <a:xfrm>
+            <a:off x="548640" y="804672"/>
+            <a:ext cx="10789920" cy="822960"/>
+          </a:xfrm>
+          <a:prstGeom prst="rect">
+            <a:avLst/>
+          </a:prstGeom>
+          <a:noFill/>
+          <a:ln/>
+        </p:spPr>
+        <p:txBody>
+          <a:bodyPr wrap="square" lIns="0" tIns="0" rIns="0" bIns="0" rtlCol="0" anchor="ctr"/>
+          <a:lstStyle/>
+          <a:p>
+            <a:pPr indent="0" marL="0">
+              <a:buNone/>
+            </a:pPr>
+            <a:r>
+              <a:rPr lang="pt-BR" sz="2600" b="1" kern="0" dirty="0">
+                <a:solidFill>
+                  <a:srgbClr val="1B3A5C"/>
+                </a:solidFill>
+                <a:latin typeface="Cambria" pitchFamily="34" charset="0"/>
+                <a:ea typeface="Cambria" pitchFamily="34" charset="-122"/>
+                <a:cs typeface="Cambria" pitchFamily="34" charset="-120"/>
+              </a:rPr>
+              <a:t>O que a literatura diz sobre isso</a:t>
+            </a:r>
+            <a:endParaRPr lang="pt-BR" sz="2600" dirty="0"/>
+          </a:p>
+        </p:txBody>
+      </p:sp>
+      <p:sp>
+        <p:nvSpPr>
+          <p:cNvPr id="902" name="Itens"/>
+          <p:cNvSpPr/>
+          <p:nvPr/>
+        </p:nvSpPr>
+        <p:spPr>
+          <a:xfrm>
+            <a:off x="548640" y="1783080"/>
+            <a:ext cx="10789920" cy="1554480"/>
+          </a:xfrm>
+          <a:prstGeom prst="rect">
+            <a:avLst/>
+          </a:prstGeom>
+          <a:noFill/>
+          <a:ln/>
+        </p:spPr>
+        <p:txBody>
+          <a:bodyPr wrap="square" lIns="0" tIns="0" rIns="0" bIns="0" rtlCol="0" anchor="t"/>
+          <a:lstStyle/>
+          <a:p>
+            <a:pPr indent="-182880" marL="182880">
+              <a:lnSpc>
+                <a:spcPct val="125000"/>
+              </a:lnSpc>
+              <a:spcAft>
+                <a:spcPts val="180"/>
+              </a:spcAft>
+              <a:buFont typeface="Arial"/>
+              <a:buChar char="•"/>
+            </a:pPr>
+            <a:r>
+              <a:rPr lang="pt-BR" sz="1400" dirty="0">
+                <a:solidFill>
+                  <a:srgbClr val="3A4A5C"/>
+                </a:solidFill>
+                <a:latin typeface="Calibri" pitchFamily="34" charset="0"/>
+                <a:ea typeface="Calibri" pitchFamily="34" charset="-122"/>
+                <a:cs typeface="Calibri" pitchFamily="34" charset="-120"/>
+              </a:rPr>
+              <a:t>As três próximas tarefas praticam, em Julia no Pluto, a mesma distinção desta aula: ação genérica, método especializado e escolha automática — usando despacho múltiplo (multiple dispatch), o mecanismo de Julia que decide sozinho qual método rodar.</a:t>
+            </a:r>
+            <a:endParaRPr lang="pt-BR" sz="1400" dirty="0"/>
+          </a:p>
+        </p:txBody>
+      </p:sp>
+      <p:sp>
+        <p:nvSpPr>
+          <p:cNvPr id="903" name="CaixaNotas"/>
+          <p:cNvSpPr/>
+          <p:nvPr/>
+        </p:nvSpPr>
+        <p:spPr>
+          <a:xfrm>
+            <a:off x="548640" y="3063240"/>
+            <a:ext cx="10789920" cy="2574036"/>
+          </a:xfrm>
+          <a:prstGeom prst="roundRect">
+            <a:avLst>
+              <a:gd name="adj" fmla="val 8000"/>
+            </a:avLst>
+          </a:prstGeom>
+          <a:solidFill>
+            <a:srgbClr val="EEF3F8"/>
+          </a:solidFill>
+          <a:ln w="12700">
+            <a:solidFill>
+              <a:srgbClr val="2C7A8C"/>
+            </a:solidFill>
+          </a:ln>
+        </p:spPr>
+        <p:txBody>
+          <a:bodyPr/>
+          <a:p/>
+        </p:txBody>
+      </p:sp>
+      <p:sp>
+        <p:nvSpPr>
+          <p:cNvPr id="904" name="TituloNotas"/>
+          <p:cNvSpPr/>
+          <p:nvPr/>
+        </p:nvSpPr>
+        <p:spPr>
+          <a:xfrm>
+            <a:off x="868680" y="3227832"/>
+            <a:ext cx="10149840" cy="320040"/>
+          </a:xfrm>
+          <a:prstGeom prst="rect">
+            <a:avLst/>
+          </a:prstGeom>
+          <a:noFill/>
+          <a:ln/>
+        </p:spPr>
+        <p:txBody>
+          <a:bodyPr wrap="square" lIns="0" tIns="0" rIns="0" bIns="0" rtlCol="0" anchor="t"/>
+          <a:lstStyle/>
+          <a:p>
+            <a:pPr indent="0" marL="0">
+              <a:buNone/>
+            </a:pPr>
+            <a:r>
+              <a:rPr lang="pt-BR" sz="1150" b="1" kern="0" dirty="0">
+                <a:solidFill>
+                  <a:srgbClr val="2C7A8C"/>
+                </a:solidFill>
+                <a:latin typeface="Calibri" pitchFamily="34" charset="0"/>
+                <a:ea typeface="Calibri" pitchFamily="34" charset="-122"/>
+                <a:cs typeface="Calibri" pitchFamily="34" charset="-120"/>
+              </a:rPr>
+              <a:t>Como isso se conecta ao que já estudamos</a:t>
+            </a:r>
+            <a:endParaRPr lang="pt-BR" sz="1150" dirty="0"/>
+          </a:p>
+        </p:txBody>
+      </p:sp>
+      <p:sp>
+        <p:nvSpPr>
+          <p:cNvPr id="905" name="Notas"/>
+          <p:cNvSpPr/>
+          <p:nvPr/>
+        </p:nvSpPr>
+        <p:spPr>
+          <a:xfrm>
+            <a:off x="868680" y="3593592"/>
+            <a:ext cx="10149840" cy="1933956"/>
+          </a:xfrm>
+          <a:prstGeom prst="rect">
+            <a:avLst/>
+          </a:prstGeom>
+          <a:noFill/>
+          <a:ln/>
+        </p:spPr>
+        <p:txBody>
+          <a:bodyPr wrap="square" lIns="0" tIns="0" rIns="0" bIns="0" rtlCol="0" anchor="t"/>
+          <a:lstStyle/>
+          <a:p>
+            <a:pPr indent="-160020" marL="160020">
+              <a:lnSpc>
+                <a:spcPct val="118000"/>
+              </a:lnSpc>
+              <a:spcAft>
+                <a:spcPts val="600"/>
+              </a:spcAft>
+              <a:buFont typeface="Arial"/>
+              <a:buChar char="•"/>
+            </a:pPr>
+            <a:r>
+              <a:rPr lang="pt-BR" sz="1250" dirty="0">
+                <a:solidFill>
+                  <a:srgbClr val="3A4A5C"/>
+                </a:solidFill>
+                <a:latin typeface="Calibri" pitchFamily="34" charset="0"/>
+                <a:cs typeface="Calibri" pitchFamily="34" charset="-120"/>
+              </a:rPr>
+              <a:t>RIBEIRO (2019): um algoritmo bem projetado trata cada tipo de dado com a operação que faz sentido para ele — a mesma ideia por trás de “ações ligadas a categorias”.</a:t>
+            </a:r>
+            <a:endParaRPr lang="pt-BR" sz="1250" dirty="0"/>
+          </a:p>
+          <a:p>
+            <a:pPr indent="-160020" marL="160020">
+              <a:lnSpc>
+                <a:spcPct val="118000"/>
+              </a:lnSpc>
+              <a:spcAft>
+                <a:spcPts val="600"/>
+              </a:spcAft>
+              <a:buFont typeface="Arial"/>
+              <a:buChar char="•"/>
+            </a:pPr>
+            <a:r>
+              <a:rPr lang="pt-BR" sz="1250" dirty="0">
+                <a:solidFill>
+                  <a:srgbClr val="3A4A5C"/>
+                </a:solidFill>
+                <a:latin typeface="Calibri" pitchFamily="34" charset="0"/>
+                <a:cs typeface="Calibri" pitchFamily="34" charset="-120"/>
+              </a:rPr>
+              <a:t>Felleisen et al., How to Design Programs (2001): quando um dado pode assumir formas diferentes, a receita de design ensina a escrever a função por casos, um caminho de código para cada forma. O despacho múltiplo de Julia automatiza esse mesmo raciocínio: em vez de um if por caso, cada método já sabe a que tipo pertence.</a:t>
+            </a:r>
+            <a:endParaRPr lang="pt-BR" sz="1250" dirty="0"/>
+          </a:p>
+          <a:p>
+            <a:pPr indent="-160020" marL="160020">
+              <a:lnSpc>
+                <a:spcPct val="118000"/>
+              </a:lnSpc>
+              <a:spcAft>
+                <a:spcPts val="600"/>
+              </a:spcAft>
+              <a:buFont typeface="Arial"/>
+              <a:buChar char="•"/>
+            </a:pPr>
+            <a:r>
+              <a:rPr lang="pt-BR" sz="1250" dirty="0">
+                <a:solidFill>
+                  <a:srgbClr val="3A4A5C"/>
+                </a:solidFill>
+                <a:latin typeface="Calibri" pitchFamily="34" charset="0"/>
+                <a:cs typeface="Calibri" pitchFamily="34" charset="-120"/>
+              </a:rPr>
+              <a:t>RAABE, ZORZO e BLIKSTEIN (2020): reconhecer a categoria de um dado antes de agir sobre ele é uma aplicação direta do pilar “reconhecimento de padrões” do Pensamento Computacional.</a:t>
+            </a:r>
+            <a:endParaRPr lang="pt-BR" sz="1250" dirty="0"/>
+          </a:p>
+        </p:txBody>
+      </p:sp>
+      <p:sp>
+        <p:nvSpPr>
+          <p:cNvPr id="910" name="Rodape"/>
+          <p:cNvSpPr/>
+          <p:nvPr/>
+        </p:nvSpPr>
+        <p:spPr>
+          <a:xfrm>
+            <a:off x="548640" y="6355080"/>
+            <a:ext cx="7315200" cy="274320"/>
+          </a:xfrm>
+          <a:prstGeom prst="rect">
+            <a:avLst/>
+          </a:prstGeom>
+          <a:noFill/>
+          <a:ln/>
+        </p:spPr>
+        <p:txBody>
+          <a:bodyPr wrap="square" lIns="0" tIns="0" rIns="0" bIns="0" rtlCol="0" anchor="ctr"/>
+          <a:lstStyle/>
+          <a:p>
+            <a:pPr indent="0" marL="0">
+              <a:buNone/>
+            </a:pPr>
+            <a:r>
+              <a:rPr lang="pt-BR" sz="900" kern="0" dirty="0">
+                <a:solidFill>
+                  <a:srgbClr val="9AA5B1"/>
+                </a:solidFill>
+                <a:latin typeface="Calibri" pitchFamily="34" charset="0"/>
+                <a:ea typeface="Calibri" pitchFamily="34" charset="-122"/>
+                <a:cs typeface="Calibri" pitchFamily="34" charset="-120"/>
+              </a:rPr>
+              <a:t>Aula 12 · Ações Ligadas a Categorias</a:t>
+            </a:r>
+            <a:endParaRPr lang="pt-BR" sz="900" dirty="0"/>
+          </a:p>
+        </p:txBody>
+      </p:sp>
+      <p:sp>
+        <p:nvSpPr>
+          <p:cNvPr id="911" name="Pagina"/>
+          <p:cNvSpPr/>
+          <p:nvPr/>
+        </p:nvSpPr>
+        <p:spPr>
+          <a:xfrm>
+            <a:off x="10972800" y="6355080"/>
+            <a:ext cx="731520" cy="274320"/>
+          </a:xfrm>
+          <a:prstGeom prst="rect">
+            <a:avLst/>
+          </a:prstGeom>
+          <a:noFill/>
+          <a:ln/>
+        </p:spPr>
+        <p:txBody>
+          <a:bodyPr wrap="square" lIns="0" tIns="0" rIns="0" bIns="0" rtlCol="0" anchor="ctr"/>
+          <a:lstStyle/>
+          <a:p>
+            <a:pPr algn="r" indent="0" marL="0">
+              <a:buNone/>
+            </a:pPr>
+            <a:r>
+              <a:rPr lang="pt-BR" sz="900" kern="0" dirty="0">
+                <a:solidFill>
+                  <a:srgbClr val="9AA5B1"/>
+                </a:solidFill>
+                <a:latin typeface="Calibri" pitchFamily="34" charset="0"/>
+                <a:ea typeface="Calibri" pitchFamily="34" charset="-122"/>
+                <a:cs typeface="Calibri" pitchFamily="34" charset="-120"/>
+              </a:rPr>
+              <a:t>05</a:t>
+            </a:r>
+            <a:endParaRPr lang="pt-BR" sz="900" dirty="0"/>
+          </a:p>
+        </p:txBody>
+      </p:sp>
+    </p:spTree>
+  </p:cSld>
+  <p:clrMapOvr>
+    <a:masterClrMapping/>
+  </p:clrMapOvr>
+</p:sld>
+</file>
+
+<file path=ppt/slides/slide8.xml><?xml version="1.0" encoding="utf-8"?>
+<p:sld xmlns:a="http://schemas.openxmlformats.org/drawingml/2006/main" xmlns:r="http://schemas.openxmlformats.org/officeDocument/2006/relationships" xmlns:p="http://schemas.openxmlformats.org/presentationml/2006/main">
+  <p:cSld name="Tarefa">
+    <p:bg>
+      <p:bgPr>
+        <a:solidFill>
+          <a:srgbClr val="FFFFFF"/>
+        </a:solidFill>
+      </p:bgPr>
+    </p:bg>
+    <p:spTree>
+      <p:nvGrpSpPr>
+        <p:cNvPr id="1" name=""/>
+        <p:cNvGrpSpPr/>
+        <p:nvPr/>
+      </p:nvGrpSpPr>
+      <p:grpSpPr>
+        <a:xfrm>
+          <a:off x="0" y="0"/>
+          <a:ext cx="0" cy="0"/>
+          <a:chOff x="0" y="0"/>
+          <a:chExt cx="0" cy="0"/>
+        </a:xfrm>
+      </p:grpSpPr>
+      <p:sp>
+        <p:nvSpPr>
+          <p:cNvPr id="900" name="Kicker"/>
+          <p:cNvSpPr/>
+          <p:nvPr/>
+        </p:nvSpPr>
+        <p:spPr>
+          <a:xfrm>
+            <a:off x="548640" y="411480"/>
+            <a:ext cx="5486400" cy="320040"/>
+          </a:xfrm>
+          <a:prstGeom prst="rect">
+            <a:avLst/>
+          </a:prstGeom>
+          <a:noFill/>
+          <a:ln/>
+        </p:spPr>
+        <p:txBody>
+          <a:bodyPr wrap="square" lIns="0" tIns="0" rIns="0" bIns="0" rtlCol="0" anchor="ctr"/>
+          <a:lstStyle/>
+          <a:p>
+            <a:pPr indent="0" marL="0">
+              <a:buNone/>
+            </a:pPr>
+            <a:r>
+              <a:rPr lang="pt-BR" sz="1200" b="1" spc="200" kern="0" dirty="0">
+                <a:solidFill>
+                  <a:srgbClr val="E8963C"/>
+                </a:solidFill>
+                <a:latin typeface="Calibri" pitchFamily="34" charset="0"/>
+                <a:ea typeface="Calibri" pitchFamily="34" charset="-122"/>
+                <a:cs typeface="Calibri" pitchFamily="34" charset="-120"/>
+              </a:rPr>
+              <a:t>TAREFA 12.1</a:t>
+            </a:r>
+            <a:endParaRPr lang="pt-BR" sz="1200" dirty="0"/>
+          </a:p>
+        </p:txBody>
+      </p:sp>
+      <p:sp>
+        <p:nvSpPr>
+          <p:cNvPr id="901" name="Titulo"/>
+          <p:cNvSpPr/>
+          <p:nvPr/>
+        </p:nvSpPr>
+        <p:spPr>
+          <a:xfrm>
+            <a:off x="548640" y="749808"/>
+            <a:ext cx="10789920" cy="868680"/>
+          </a:xfrm>
+          <a:prstGeom prst="rect">
+            <a:avLst/>
+          </a:prstGeom>
+          <a:noFill/>
+          <a:ln/>
+        </p:spPr>
+        <p:txBody>
+          <a:bodyPr wrap="square" lIns="0" tIns="0" rIns="0" bIns="0" rtlCol="0" anchor="ctr"/>
+          <a:lstStyle/>
+          <a:p>
+            <a:pPr indent="0" marL="0">
+              <a:buNone/>
+            </a:pPr>
+            <a:r>
+              <a:rPr lang="pt-BR" sz="2500" b="1" kern="0" dirty="0">
+                <a:solidFill>
+                  <a:srgbClr val="1B3A5C"/>
+                </a:solidFill>
+                <a:latin typeface="Cambria" pitchFamily="34" charset="0"/>
+                <a:ea typeface="Cambria" pitchFamily="34" charset="-122"/>
+                <a:cs typeface="Cambria" pitchFamily="34" charset="-120"/>
+              </a:rPr>
+              <a:t>Como a mesma função se comporta diferente por tipo?</a:t>
+            </a:r>
+            <a:endParaRPr lang="pt-BR" sz="2500" dirty="0"/>
+          </a:p>
+        </p:txBody>
+      </p:sp>
+      <p:sp>
+        <p:nvSpPr>
+          <p:cNvPr id="902" name="RotuloPluto"/>
+          <p:cNvSpPr/>
+          <p:nvPr/>
+        </p:nvSpPr>
+        <p:spPr>
+          <a:xfrm>
+            <a:off x="548640" y="1783080"/>
+            <a:ext cx="5120640" cy="292608"/>
+          </a:xfrm>
+          <a:prstGeom prst="rect">
+            <a:avLst/>
+          </a:prstGeom>
+          <a:noFill/>
+          <a:ln/>
+        </p:spPr>
+        <p:txBody>
+          <a:bodyPr wrap="square" lIns="0" tIns="0" rIns="0" bIns="0" rtlCol="0" anchor="ctr"/>
+          <a:lstStyle/>
+          <a:p>
+            <a:pPr indent="0" marL="0">
+              <a:buNone/>
+            </a:pPr>
+            <a:r>
+              <a:rPr lang="pt-BR" sz="1100" b="1" spc="100" kern="0" dirty="0">
+                <a:solidFill>
+                  <a:srgbClr val="3A4A5C"/>
+                </a:solidFill>
+                <a:latin typeface="Calibri" pitchFamily="34" charset="0"/>
+                <a:ea typeface="Calibri" pitchFamily="34" charset="-122"/>
+                <a:cs typeface="Calibri" pitchFamily="34" charset="-120"/>
+              </a:rPr>
+              <a:t>NO PLUTO</a:t>
+            </a:r>
+            <a:endParaRPr lang="pt-BR" sz="1100" dirty="0"/>
+          </a:p>
+        </p:txBody>
+      </p:sp>
+      <p:sp>
+        <p:nvSpPr>
+          <p:cNvPr id="903" name="Instrucoes"/>
+          <p:cNvSpPr/>
+          <p:nvPr/>
+        </p:nvSpPr>
+        <p:spPr>
+          <a:xfrm>
+            <a:off x="548640" y="2148840"/>
+            <a:ext cx="5120640" cy="2103120"/>
+          </a:xfrm>
+          <a:prstGeom prst="rect">
+            <a:avLst/>
+          </a:prstGeom>
+          <a:noFill/>
+          <a:ln/>
+        </p:spPr>
+        <p:txBody>
+          <a:bodyPr wrap="square" lIns="0" tIns="0" rIns="0" bIns="0" rtlCol="0" anchor="t"/>
+          <a:lstStyle/>
+          <a:p>
+            <a:pPr indent="-182880" marL="182880">
+              <a:lnSpc>
+                <a:spcPct val="125000"/>
+              </a:lnSpc>
+              <a:spcAft>
+                <a:spcPts val="280"/>
+              </a:spcAft>
+              <a:buFont typeface="Arial"/>
+              <a:buChar char="•"/>
+            </a:pPr>
+            <a:r>
+              <a:rPr lang="pt-BR" sz="1350" dirty="0">
+                <a:solidFill>
+                  <a:srgbClr val="3A4A5C"/>
+                </a:solidFill>
+                <a:latin typeface="Calibri" pitchFamily="34" charset="0"/>
+                <a:ea typeface="Calibri" pitchFamily="34" charset="-122"/>
+                <a:cs typeface="Calibri" pitchFamily="34" charset="-120"/>
+              </a:rPr>
+              <a:t>Defina tipos para Quadrado e Círculo.</a:t>
+            </a:r>
+            <a:endParaRPr lang="pt-BR" sz="1350" dirty="0"/>
+          </a:p>
+          <a:p>
+            <a:pPr indent="-182880" marL="182880">
+              <a:lnSpc>
+                <a:spcPct val="125000"/>
+              </a:lnSpc>
+              <a:spcAft>
+                <a:spcPts val="280"/>
+              </a:spcAft>
+              <a:buFont typeface="Arial"/>
+              <a:buChar char="•"/>
+            </a:pPr>
+            <a:r>
+              <a:rPr lang="pt-BR" sz="1350" dirty="0">
+                <a:solidFill>
+                  <a:srgbClr val="3A4A5C"/>
+                </a:solidFill>
+                <a:latin typeface="Calibri" pitchFamily="34" charset="0"/>
+                <a:ea typeface="Calibri" pitchFamily="34" charset="-122"/>
+                <a:cs typeface="Calibri" pitchFamily="34" charset="-120"/>
+              </a:rPr>
+              <a:t>Escreva um método de area especializado para cada tipo.</a:t>
+            </a:r>
+            <a:endParaRPr lang="pt-BR" sz="1350" dirty="0"/>
+          </a:p>
+          <a:p>
+            <a:pPr indent="-182880" marL="182880">
+              <a:lnSpc>
+                <a:spcPct val="125000"/>
+              </a:lnSpc>
+              <a:spcAft>
+                <a:spcPts val="280"/>
+              </a:spcAft>
+              <a:buFont typeface="Arial"/>
+              <a:buChar char="•"/>
+            </a:pPr>
+            <a:r>
+              <a:rPr lang="pt-BR" sz="1350" dirty="0">
+                <a:solidFill>
+                  <a:srgbClr val="3A4A5C"/>
+                </a:solidFill>
+                <a:latin typeface="Calibri" pitchFamily="34" charset="0"/>
+                <a:ea typeface="Calibri" pitchFamily="34" charset="-122"/>
+                <a:cs typeface="Calibri" pitchFamily="34" charset="-120"/>
+              </a:rPr>
+              <a:t>Chame area(...) para as duas formas.</a:t>
+            </a:r>
+            <a:endParaRPr lang="pt-BR" sz="1350" dirty="0"/>
+          </a:p>
+        </p:txBody>
+      </p:sp>
+      <p:sp>
+        <p:nvSpPr>
+          <p:cNvPr id="904" name="CartaoCodigo"/>
+          <p:cNvSpPr/>
+          <p:nvPr/>
+        </p:nvSpPr>
+        <p:spPr>
+          <a:xfrm>
+            <a:off x="5943600" y="1783080"/>
+            <a:ext cx="5669280" cy="2788920"/>
+          </a:xfrm>
+          <a:prstGeom prst="roundRect">
+            <a:avLst>
+              <a:gd name="adj" fmla="val 8000"/>
+            </a:avLst>
+          </a:prstGeom>
+          <a:solidFill>
+            <a:srgbClr val="1B3A5C"/>
+          </a:solidFill>
+          <a:ln>
+            <a:noFill/>
+          </a:ln>
+          <a:effectLst>
+            <a:outerShdw sx="100000" sy="100000" kx="0" ky="0" algn="bl" rotWithShape="0" blurRad="101600" dist="38100" dir="5400000">
+              <a:srgbClr val="44546A">
+                <a:alpha val="35000"/>
+              </a:srgbClr>
+            </a:outerShdw>
+          </a:effectLst>
+        </p:spPr>
+        <p:txBody>
+          <a:bodyPr/>
+          <a:p/>
+        </p:txBody>
+      </p:sp>
+      <p:sp>
+        <p:nvSpPr>
+          <p:cNvPr id="905" name="Codigo"/>
+          <p:cNvSpPr/>
+          <p:nvPr/>
+        </p:nvSpPr>
+        <p:spPr>
+          <a:xfrm>
+            <a:off x="6263640" y="2057400"/>
+            <a:ext cx="5029200" cy="2240280"/>
+          </a:xfrm>
+          <a:prstGeom prst="rect">
+            <a:avLst/>
+          </a:prstGeom>
+          <a:noFill/>
+          <a:ln/>
+        </p:spPr>
+        <p:txBody>
+          <a:bodyPr wrap="square" lIns="0" tIns="0" rIns="0" bIns="0" rtlCol="0" anchor="t"/>
+          <a:lstStyle/>
+          <a:p>
+            <a:pPr indent="0" marL="0">
+              <a:lnSpc>
+                <a:spcPct val="130000"/>
+              </a:lnSpc>
+              <a:buNone/>
+            </a:pPr>
+            <a:r>
+              <a:rPr lang="pt-BR" sz="1300" dirty="0">
+                <a:solidFill>
+                  <a:srgbClr val="E9EEF3"/>
+                </a:solidFill>
+                <a:latin typeface="Courier New" pitchFamily="34" charset="0"/>
+                <a:ea typeface="Courier New" pitchFamily="34" charset="-122"/>
+                <a:cs typeface="Courier New" pitchFamily="34" charset="-120"/>
+              </a:rPr>
+              <a:t>struct Quadrado</a:t>
+            </a:r>
+            <a:endParaRPr lang="pt-BR" sz="1300" dirty="0"/>
+          </a:p>
+          <a:p>
+            <a:pPr indent="0" marL="0">
+              <a:lnSpc>
+                <a:spcPct val="130000"/>
+              </a:lnSpc>
+              <a:buNone/>
+            </a:pPr>
+            <a:r>
+              <a:rPr lang="pt-BR" sz="1300" dirty="0">
+                <a:solidFill>
+                  <a:srgbClr val="E9EEF3"/>
+                </a:solidFill>
+                <a:latin typeface="Courier New" pitchFamily="34" charset="0"/>
+                <a:ea typeface="Courier New" pitchFamily="34" charset="-122"/>
+                <a:cs typeface="Courier New" pitchFamily="34" charset="-120"/>
+              </a:rPr>
+              <a:t>    lado::Float64</a:t>
+            </a:r>
+            <a:endParaRPr lang="pt-BR" sz="1300" dirty="0"/>
+          </a:p>
+          <a:p>
+            <a:pPr indent="0" marL="0">
+              <a:lnSpc>
+                <a:spcPct val="130000"/>
+              </a:lnSpc>
+              <a:buNone/>
+            </a:pPr>
+            <a:r>
+              <a:rPr lang="pt-BR" sz="1300" dirty="0">
+                <a:solidFill>
+                  <a:srgbClr val="E9EEF3"/>
+                </a:solidFill>
+                <a:latin typeface="Courier New" pitchFamily="34" charset="0"/>
+                <a:ea typeface="Courier New" pitchFamily="34" charset="-122"/>
+                <a:cs typeface="Courier New" pitchFamily="34" charset="-120"/>
+              </a:rPr>
+              <a:t>end</a:t>
+            </a:r>
+            <a:endParaRPr lang="pt-BR" sz="1300" dirty="0"/>
+          </a:p>
+          <a:p>
+            <a:pPr indent="0" marL="0">
+              <a:lnSpc>
+                <a:spcPct val="130000"/>
+              </a:lnSpc>
+              <a:buNone/>
+            </a:pPr>
+            <a:r>
+              <a:rPr lang="pt-BR" sz="1300" dirty="0">
+                <a:solidFill>
+                  <a:srgbClr val="E9EEF3"/>
+                </a:solidFill>
+                <a:latin typeface="Courier New" pitchFamily="34" charset="0"/>
+                <a:ea typeface="Courier New" pitchFamily="34" charset="-122"/>
+                <a:cs typeface="Courier New" pitchFamily="34" charset="-120"/>
+              </a:rPr>
+              <a:t>struct Circulo</a:t>
+            </a:r>
+            <a:endParaRPr lang="pt-BR" sz="1300" dirty="0"/>
+          </a:p>
+          <a:p>
+            <a:pPr indent="0" marL="0">
+              <a:lnSpc>
+                <a:spcPct val="130000"/>
+              </a:lnSpc>
+              <a:buNone/>
+            </a:pPr>
+            <a:r>
+              <a:rPr lang="pt-BR" sz="1300" dirty="0">
+                <a:solidFill>
+                  <a:srgbClr val="E9EEF3"/>
+                </a:solidFill>
+                <a:latin typeface="Courier New" pitchFamily="34" charset="0"/>
+                <a:ea typeface="Courier New" pitchFamily="34" charset="-122"/>
+                <a:cs typeface="Courier New" pitchFamily="34" charset="-120"/>
+              </a:rPr>
+              <a:t>    raio::Float64</a:t>
+            </a:r>
+            <a:endParaRPr lang="pt-BR" sz="1300" dirty="0"/>
+          </a:p>
+          <a:p>
+            <a:pPr indent="0" marL="0">
+              <a:lnSpc>
+                <a:spcPct val="130000"/>
+              </a:lnSpc>
+              <a:buNone/>
+            </a:pPr>
+            <a:r>
+              <a:rPr lang="pt-BR" sz="1300" dirty="0">
+                <a:solidFill>
+                  <a:srgbClr val="E9EEF3"/>
+                </a:solidFill>
+                <a:latin typeface="Courier New" pitchFamily="34" charset="0"/>
+                <a:ea typeface="Courier New" pitchFamily="34" charset="-122"/>
+                <a:cs typeface="Courier New" pitchFamily="34" charset="-120"/>
+              </a:rPr>
+              <a:t>end</a:t>
+            </a:r>
+            <a:endParaRPr lang="pt-BR" sz="1300" dirty="0"/>
+          </a:p>
+          <a:p>
+            <a:pPr indent="0" marL="0">
+              <a:lnSpc>
+                <a:spcPct val="130000"/>
+              </a:lnSpc>
+              <a:buNone/>
+            </a:pPr>
+            <a:r>
+              <a:rPr lang="pt-BR" sz="1300" dirty="0">
+                <a:solidFill>
+                  <a:srgbClr val="E9EEF3"/>
+                </a:solidFill>
+                <a:latin typeface="Courier New" pitchFamily="34" charset="0"/>
+                <a:ea typeface="Courier New" pitchFamily="34" charset="-122"/>
+                <a:cs typeface="Courier New" pitchFamily="34" charset="-120"/>
+              </a:rPr>
+              <a:t> </a:t>
+            </a:r>
+            <a:endParaRPr lang="pt-BR" sz="1300" dirty="0"/>
+          </a:p>
+          <a:p>
+            <a:pPr indent="0" marL="0">
+              <a:lnSpc>
+                <a:spcPct val="130000"/>
+              </a:lnSpc>
+              <a:buNone/>
+            </a:pPr>
+            <a:r>
+              <a:rPr lang="pt-BR" sz="1300" dirty="0">
+                <a:solidFill>
+                  <a:srgbClr val="E9EEF3"/>
+                </a:solidFill>
+                <a:latin typeface="Courier New" pitchFamily="34" charset="0"/>
+                <a:ea typeface="Courier New" pitchFamily="34" charset="-122"/>
+                <a:cs typeface="Courier New" pitchFamily="34" charset="-120"/>
+              </a:rPr>
+              <a:t>area(f::Quadrado) = f.lado^2</a:t>
+            </a:r>
+            <a:endParaRPr lang="pt-BR" sz="1300" dirty="0"/>
+          </a:p>
+          <a:p>
+            <a:pPr indent="0" marL="0">
+              <a:lnSpc>
+                <a:spcPct val="130000"/>
+              </a:lnSpc>
+              <a:buNone/>
+            </a:pPr>
+            <a:r>
+              <a:rPr lang="pt-BR" sz="1300" dirty="0">
+                <a:solidFill>
+                  <a:srgbClr val="E9EEF3"/>
+                </a:solidFill>
+                <a:latin typeface="Courier New" pitchFamily="34" charset="0"/>
+                <a:ea typeface="Courier New" pitchFamily="34" charset="-122"/>
+                <a:cs typeface="Courier New" pitchFamily="34" charset="-120"/>
+              </a:rPr>
+              <a:t>area(f::Circulo) = pi * f.raio^2</a:t>
+            </a:r>
+            <a:endParaRPr lang="pt-BR" sz="1300" dirty="0"/>
+          </a:p>
+        </p:txBody>
+      </p:sp>
+      <p:sp>
+        <p:nvSpPr>
+          <p:cNvPr id="906" name="CaixaTraco"/>
+          <p:cNvSpPr/>
+          <p:nvPr/>
+        </p:nvSpPr>
+        <p:spPr>
+          <a:xfrm>
+            <a:off x="5943600" y="4754880"/>
+            <a:ext cx="5669280" cy="1088136"/>
+          </a:xfrm>
+          <a:prstGeom prst="roundRect">
+            <a:avLst>
+              <a:gd name="adj" fmla="val 8000"/>
+            </a:avLst>
+          </a:prstGeom>
+          <a:solidFill>
+            <a:srgbClr val="EEF3F8"/>
+          </a:solidFill>
+          <a:ln>
+            <a:noFill/>
+          </a:ln>
+        </p:spPr>
+        <p:txBody>
+          <a:bodyPr/>
+          <a:p/>
+        </p:txBody>
+      </p:sp>
+      <p:sp>
+        <p:nvSpPr>
+          <p:cNvPr id="907" name="Traco"/>
+          <p:cNvSpPr/>
+          <p:nvPr/>
+        </p:nvSpPr>
+        <p:spPr>
+          <a:xfrm>
+            <a:off x="6217920" y="4892040"/>
+            <a:ext cx="5120640" cy="813816"/>
+          </a:xfrm>
+          <a:prstGeom prst="rect">
+            <a:avLst/>
+          </a:prstGeom>
+          <a:noFill/>
+          <a:ln/>
+        </p:spPr>
+        <p:txBody>
+          <a:bodyPr wrap="square" lIns="0" tIns="0" rIns="0" bIns="0" rtlCol="0" anchor="t"/>
+          <a:lstStyle/>
+          <a:p>
+            <a:pPr indent="0" marL="0">
+              <a:lnSpc>
+                <a:spcPct val="120000"/>
+              </a:lnSpc>
+              <a:buNone/>
+            </a:pPr>
+            <a:r>
+              <a:rPr lang="pt-BR" sz="1250" b="1" dirty="0">
+                <a:solidFill>
+                  <a:srgbClr val="2C7A8C"/>
+                </a:solidFill>
+                <a:latin typeface="Courier New" pitchFamily="34" charset="0"/>
+                <a:cs typeface="Courier New" pitchFamily="34" charset="-120"/>
+              </a:rPr>
+              <a:t>area(Quadrado(4.0))</a:t>
+            </a:r>
+            <a:r>
+              <a:rPr lang="pt-BR" sz="1250" dirty="0">
+                <a:solidFill>
+                  <a:srgbClr val="3A4A5C"/>
+                </a:solidFill>
+                <a:latin typeface="Courier New" pitchFamily="34" charset="0"/>
+                <a:cs typeface="Courier New" pitchFamily="34" charset="-120"/>
+              </a:rPr>
+              <a:t>  →  16.0</a:t>
+            </a:r>
+            <a:endParaRPr lang="pt-BR" sz="1250" dirty="0"/>
+          </a:p>
+          <a:p>
+            <a:pPr indent="0" marL="0">
+              <a:lnSpc>
+                <a:spcPct val="120000"/>
+              </a:lnSpc>
+              <a:buNone/>
+            </a:pPr>
+            <a:r>
+              <a:rPr lang="pt-BR" sz="1250" b="1" dirty="0">
+                <a:solidFill>
+                  <a:srgbClr val="2C7A8C"/>
+                </a:solidFill>
+                <a:latin typeface="Courier New" pitchFamily="34" charset="0"/>
+                <a:cs typeface="Courier New" pitchFamily="34" charset="-120"/>
+              </a:rPr>
+              <a:t>area(Circulo(3.0))</a:t>
+            </a:r>
+            <a:r>
+              <a:rPr lang="pt-BR" sz="1250" dirty="0">
+                <a:solidFill>
+                  <a:srgbClr val="3A4A5C"/>
+                </a:solidFill>
+                <a:latin typeface="Courier New" pitchFamily="34" charset="0"/>
+                <a:cs typeface="Courier New" pitchFamily="34" charset="-120"/>
+              </a:rPr>
+              <a:t>  →  28.27</a:t>
+            </a:r>
+            <a:endParaRPr lang="pt-BR" sz="1250" dirty="0"/>
+          </a:p>
+        </p:txBody>
+      </p:sp>
+      <p:sp>
+        <p:nvSpPr>
+          <p:cNvPr id="908" name="CaixaNota"/>
+          <p:cNvSpPr/>
+          <p:nvPr/>
+        </p:nvSpPr>
+        <p:spPr>
+          <a:xfrm>
+            <a:off x="548640" y="4343400"/>
+            <a:ext cx="5120640" cy="1234440"/>
+          </a:xfrm>
+          <a:prstGeom prst="roundRect">
+            <a:avLst>
+              <a:gd name="adj" fmla="val 8000"/>
+            </a:avLst>
+          </a:prstGeom>
+          <a:solidFill>
+            <a:srgbClr val="FCF3E7"/>
+          </a:solidFill>
+          <a:ln w="12700">
+            <a:solidFill>
+              <a:srgbClr val="E8963C"/>
+            </a:solidFill>
+          </a:ln>
+        </p:spPr>
+        <p:txBody>
+          <a:bodyPr/>
+          <a:p/>
+        </p:txBody>
+      </p:sp>
+      <p:sp>
+        <p:nvSpPr>
+          <p:cNvPr id="909" name="Nota"/>
+          <p:cNvSpPr/>
+          <p:nvPr/>
+        </p:nvSpPr>
+        <p:spPr>
+          <a:xfrm>
+            <a:off x="777240" y="4343400"/>
+            <a:ext cx="4663440" cy="1234440"/>
+          </a:xfrm>
+          <a:prstGeom prst="rect">
+            <a:avLst/>
+          </a:prstGeom>
+          <a:noFill/>
+          <a:ln/>
+        </p:spPr>
+        <p:txBody>
+          <a:bodyPr wrap="square" lIns="0" tIns="0" rIns="0" bIns="0" rtlCol="0" anchor="ctr"/>
+          <a:lstStyle/>
+          <a:p>
+            <a:pPr indent="0" marL="0">
+              <a:buNone/>
+            </a:pPr>
+            <a:r>
+              <a:rPr lang="pt-BR" sz="1150" i="1" kern="0" dirty="0">
+                <a:solidFill>
+                  <a:srgbClr val="8A5A17"/>
+                </a:solidFill>
+                <a:latin typeface="Calibri" pitchFamily="34" charset="0"/>
+                <a:ea typeface="Calibri" pitchFamily="34" charset="-122"/>
+                <a:cs typeface="Calibri" pitchFamily="34" charset="-120"/>
+              </a:rPr>
+              <a:t>“area” é uma única função genérica — mas cada tipo usa sua própria fórmula. Julia escolhe o método certo sozinha, pelo tipo do argumento (despacho múltiplo).</a:t>
+            </a:r>
+            <a:endParaRPr lang="pt-BR" sz="1150" dirty="0"/>
+          </a:p>
+        </p:txBody>
+      </p:sp>
+      <p:sp>
+        <p:nvSpPr>
+          <p:cNvPr id="910" name="Rodape"/>
+          <p:cNvSpPr/>
+          <p:nvPr/>
+        </p:nvSpPr>
+        <p:spPr>
+          <a:xfrm>
+            <a:off x="548640" y="6355080"/>
+            <a:ext cx="7315200" cy="274320"/>
+          </a:xfrm>
+          <a:prstGeom prst="rect">
+            <a:avLst/>
+          </a:prstGeom>
+          <a:noFill/>
+          <a:ln/>
+        </p:spPr>
+        <p:txBody>
+          <a:bodyPr wrap="square" lIns="0" tIns="0" rIns="0" bIns="0" rtlCol="0" anchor="ctr"/>
+          <a:lstStyle/>
+          <a:p>
+            <a:pPr indent="0" marL="0">
+              <a:buNone/>
+            </a:pPr>
+            <a:r>
+              <a:rPr lang="pt-BR" sz="900" kern="0" dirty="0">
+                <a:solidFill>
+                  <a:srgbClr val="9AA5B1"/>
+                </a:solidFill>
+                <a:latin typeface="Calibri" pitchFamily="34" charset="0"/>
+                <a:ea typeface="Calibri" pitchFamily="34" charset="-122"/>
+                <a:cs typeface="Calibri" pitchFamily="34" charset="-120"/>
+              </a:rPr>
+              <a:t>Aula 12 · Ações Ligadas a Categorias</a:t>
+            </a:r>
+            <a:endParaRPr lang="pt-BR" sz="900" dirty="0"/>
+          </a:p>
+        </p:txBody>
+      </p:sp>
+      <p:sp>
+        <p:nvSpPr>
+          <p:cNvPr id="911" name="Pagina"/>
+          <p:cNvSpPr/>
+          <p:nvPr/>
+        </p:nvSpPr>
+        <p:spPr>
+          <a:xfrm>
+            <a:off x="10972800" y="6355080"/>
+            <a:ext cx="731520" cy="274320"/>
+          </a:xfrm>
+          <a:prstGeom prst="rect">
+            <a:avLst/>
+          </a:prstGeom>
+          <a:noFill/>
+          <a:ln/>
+        </p:spPr>
+        <p:txBody>
+          <a:bodyPr wrap="square" lIns="0" tIns="0" rIns="0" bIns="0" rtlCol="0" anchor="ctr"/>
+          <a:lstStyle/>
+          <a:p>
+            <a:pPr algn="r" indent="0" marL="0">
+              <a:buNone/>
+            </a:pPr>
+            <a:r>
+              <a:rPr lang="pt-BR" sz="900" kern="0" dirty="0">
+                <a:solidFill>
+                  <a:srgbClr val="9AA5B1"/>
+                </a:solidFill>
+                <a:latin typeface="Calibri" pitchFamily="34" charset="0"/>
+                <a:ea typeface="Calibri" pitchFamily="34" charset="-122"/>
+                <a:cs typeface="Calibri" pitchFamily="34" charset="-120"/>
+              </a:rPr>
+              <a:t>06</a:t>
+            </a:r>
+            <a:endParaRPr lang="pt-BR" sz="900" dirty="0"/>
+          </a:p>
+        </p:txBody>
+      </p:sp>
+    </p:spTree>
+  </p:cSld>
+  <p:clrMapOvr>
+    <a:masterClrMapping/>
+  </p:clrMapOvr>
+</p:sld>
+</file>
+
+<file path=ppt/slides/slide9.xml><?xml version="1.0" encoding="utf-8"?>
+<p:sld xmlns:a="http://schemas.openxmlformats.org/drawingml/2006/main" xmlns:r="http://schemas.openxmlformats.org/officeDocument/2006/relationships" xmlns:p="http://schemas.openxmlformats.org/presentationml/2006/main">
+  <p:cSld name="Tarefa">
+    <p:bg>
+      <p:bgPr>
+        <a:solidFill>
+          <a:srgbClr val="FFFFFF"/>
+        </a:solidFill>
+      </p:bgPr>
+    </p:bg>
+    <p:spTree>
+      <p:nvGrpSpPr>
+        <p:cNvPr id="1" name=""/>
+        <p:cNvGrpSpPr/>
+        <p:nvPr/>
+      </p:nvGrpSpPr>
+      <p:grpSpPr>
+        <a:xfrm>
+          <a:off x="0" y="0"/>
+          <a:ext cx="0" cy="0"/>
+          <a:chOff x="0" y="0"/>
+          <a:chExt cx="0" cy="0"/>
+        </a:xfrm>
+      </p:grpSpPr>
+      <p:sp>
+        <p:nvSpPr>
+          <p:cNvPr id="900" name="Kicker"/>
+          <p:cNvSpPr/>
+          <p:nvPr/>
+        </p:nvSpPr>
+        <p:spPr>
+          <a:xfrm>
+            <a:off x="548640" y="411480"/>
+            <a:ext cx="5486400" cy="320040"/>
+          </a:xfrm>
+          <a:prstGeom prst="rect">
+            <a:avLst/>
+          </a:prstGeom>
+          <a:noFill/>
+          <a:ln/>
+        </p:spPr>
+        <p:txBody>
+          <a:bodyPr wrap="square" lIns="0" tIns="0" rIns="0" bIns="0" rtlCol="0" anchor="ctr"/>
+          <a:lstStyle/>
+          <a:p>
+            <a:pPr indent="0" marL="0">
+              <a:buNone/>
+            </a:pPr>
+            <a:r>
+              <a:rPr lang="pt-BR" sz="1200" b="1" spc="200" kern="0" dirty="0">
+                <a:solidFill>
+                  <a:srgbClr val="E8963C"/>
+                </a:solidFill>
+                <a:latin typeface="Calibri" pitchFamily="34" charset="0"/>
+                <a:ea typeface="Calibri" pitchFamily="34" charset="-122"/>
+                <a:cs typeface="Calibri" pitchFamily="34" charset="-120"/>
+              </a:rPr>
+              <a:t>TAREFA 12.2</a:t>
+            </a:r>
+            <a:endParaRPr lang="pt-BR" sz="1200" dirty="0"/>
+          </a:p>
+        </p:txBody>
+      </p:sp>
+      <p:sp>
+        <p:nvSpPr>
+          <p:cNvPr id="901" name="Titulo"/>
+          <p:cNvSpPr/>
+          <p:nvPr/>
+        </p:nvSpPr>
+        <p:spPr>
+          <a:xfrm>
+            <a:off x="548640" y="749808"/>
+            <a:ext cx="10789920" cy="868680"/>
+          </a:xfrm>
+          <a:prstGeom prst="rect">
+            <a:avLst/>
+          </a:prstGeom>
+          <a:noFill/>
+          <a:ln/>
+        </p:spPr>
+        <p:txBody>
+          <a:bodyPr wrap="square" lIns="0" tIns="0" rIns="0" bIns="0" rtlCol="0" anchor="ctr"/>
+          <a:lstStyle/>
+          <a:p>
+            <a:pPr indent="0" marL="0">
+              <a:buNone/>
+            </a:pPr>
+            <a:r>
+              <a:rPr lang="pt-BR" sz="2500" b="1" kern="0" dirty="0">
+                <a:solidFill>
+                  <a:srgbClr val="1B3A5C"/>
+                </a:solidFill>
+                <a:latin typeface="Cambria" pitchFamily="34" charset="0"/>
+                <a:ea typeface="Cambria" pitchFamily="34" charset="-122"/>
+                <a:cs typeface="Cambria" pitchFamily="34" charset="-120"/>
+              </a:rPr>
+              <a:t>Como Julia escolhe o método certo sozinha?</a:t>
+            </a:r>
+            <a:endParaRPr lang="pt-BR" sz="2500" dirty="0"/>
+          </a:p>
+        </p:txBody>
+      </p:sp>
+      <p:sp>
+        <p:nvSpPr>
+          <p:cNvPr id="902" name="RotuloPluto"/>
+          <p:cNvSpPr/>
+          <p:nvPr/>
+        </p:nvSpPr>
+        <p:spPr>
+          <a:xfrm>
+            <a:off x="548640" y="1783080"/>
+            <a:ext cx="5120640" cy="292608"/>
+          </a:xfrm>
+          <a:prstGeom prst="rect">
+            <a:avLst/>
+          </a:prstGeom>
+          <a:noFill/>
+          <a:ln/>
+        </p:spPr>
+        <p:txBody>
+          <a:bodyPr wrap="square" lIns="0" tIns="0" rIns="0" bIns="0" rtlCol="0" anchor="ctr"/>
+          <a:lstStyle/>
+          <a:p>
+            <a:pPr indent="0" marL="0">
+              <a:buNone/>
+            </a:pPr>
+            <a:r>
+              <a:rPr lang="pt-BR" sz="1100" b="1" spc="100" kern="0" dirty="0">
+                <a:solidFill>
+                  <a:srgbClr val="3A4A5C"/>
+                </a:solidFill>
+                <a:latin typeface="Calibri" pitchFamily="34" charset="0"/>
+                <a:ea typeface="Calibri" pitchFamily="34" charset="-122"/>
+                <a:cs typeface="Calibri" pitchFamily="34" charset="-120"/>
+              </a:rPr>
+              <a:t>NO PLUTO</a:t>
+            </a:r>
+            <a:endParaRPr lang="pt-BR" sz="1100" dirty="0"/>
+          </a:p>
+        </p:txBody>
+      </p:sp>
+      <p:sp>
+        <p:nvSpPr>
+          <p:cNvPr id="903" name="Instrucoes"/>
+          <p:cNvSpPr/>
+          <p:nvPr/>
+        </p:nvSpPr>
+        <p:spPr>
+          <a:xfrm>
+            <a:off x="548640" y="2148840"/>
+            <a:ext cx="5120640" cy="2103120"/>
+          </a:xfrm>
+          <a:prstGeom prst="rect">
+            <a:avLst/>
+          </a:prstGeom>
+          <a:noFill/>
+          <a:ln/>
+        </p:spPr>
+        <p:txBody>
+          <a:bodyPr wrap="square" lIns="0" tIns="0" rIns="0" bIns="0" rtlCol="0" anchor="t"/>
+          <a:lstStyle/>
+          <a:p>
+            <a:pPr indent="-182880" marL="182880">
+              <a:lnSpc>
+                <a:spcPct val="125000"/>
+              </a:lnSpc>
+              <a:spcAft>
+                <a:spcPts val="280"/>
+              </a:spcAft>
+              <a:buFont typeface="Arial"/>
+              <a:buChar char="•"/>
+            </a:pPr>
+            <a:r>
+              <a:rPr lang="pt-BR" sz="1350" dirty="0">
+                <a:solidFill>
+                  <a:srgbClr val="3A4A5C"/>
+                </a:solidFill>
+                <a:latin typeface="Calibri" pitchFamily="34" charset="0"/>
+                <a:ea typeface="Calibri" pitchFamily="34" charset="-122"/>
+                <a:cs typeface="Calibri" pitchFamily="34" charset="-120"/>
+              </a:rPr>
+              <a:t>Escreva uma função descrever com um método genérico e um método especializado para números.</a:t>
+            </a:r>
+            <a:endParaRPr lang="pt-BR" sz="1350" dirty="0"/>
+          </a:p>
+          <a:p>
+            <a:pPr indent="-182880" marL="182880">
+              <a:lnSpc>
+                <a:spcPct val="125000"/>
+              </a:lnSpc>
+              <a:spcAft>
+                <a:spcPts val="280"/>
+              </a:spcAft>
+              <a:buFont typeface="Arial"/>
+              <a:buChar char="•"/>
+            </a:pPr>
+            <a:r>
+              <a:rPr lang="pt-BR" sz="1350" dirty="0">
+                <a:solidFill>
+                  <a:srgbClr val="3A4A5C"/>
+                </a:solidFill>
+                <a:latin typeface="Calibri" pitchFamily="34" charset="0"/>
+                <a:ea typeface="Calibri" pitchFamily="34" charset="-122"/>
+                <a:cs typeface="Calibri" pitchFamily="34" charset="-120"/>
+              </a:rPr>
+              <a:t>Observe como Julia escolhe automaticamente o método certo conforme o tipo do argumento.</a:t>
+            </a:r>
+            <a:endParaRPr lang="pt-BR" sz="1350" dirty="0"/>
+          </a:p>
+        </p:txBody>
+      </p:sp>
+      <p:sp>
+        <p:nvSpPr>
+          <p:cNvPr id="904" name="CartaoCodigo"/>
+          <p:cNvSpPr/>
+          <p:nvPr/>
+        </p:nvSpPr>
+        <p:spPr>
+          <a:xfrm>
+            <a:off x="5943600" y="1783080"/>
+            <a:ext cx="5669280" cy="2788920"/>
+          </a:xfrm>
+          <a:prstGeom prst="roundRect">
+            <a:avLst>
+              <a:gd name="adj" fmla="val 8000"/>
+            </a:avLst>
+          </a:prstGeom>
+          <a:solidFill>
+            <a:srgbClr val="1B3A5C"/>
+          </a:solidFill>
+          <a:ln>
+            <a:noFill/>
+          </a:ln>
+          <a:effectLst>
+            <a:outerShdw sx="100000" sy="100000" kx="0" ky="0" algn="bl" rotWithShape="0" blurRad="101600" dist="38100" dir="5400000">
+              <a:srgbClr val="44546A">
+                <a:alpha val="35000"/>
+              </a:srgbClr>
+            </a:outerShdw>
+          </a:effectLst>
+        </p:spPr>
+        <p:txBody>
+          <a:bodyPr/>
+          <a:p/>
+        </p:txBody>
+      </p:sp>
+      <p:sp>
+        <p:nvSpPr>
+          <p:cNvPr id="905" name="Codigo"/>
+          <p:cNvSpPr/>
+          <p:nvPr/>
+        </p:nvSpPr>
+        <p:spPr>
+          <a:xfrm>
+            <a:off x="6263640" y="2057400"/>
+            <a:ext cx="5029200" cy="2240280"/>
+          </a:xfrm>
+          <a:prstGeom prst="rect">
+            <a:avLst/>
+          </a:prstGeom>
+          <a:noFill/>
+          <a:ln/>
+        </p:spPr>
+        <p:txBody>
+          <a:bodyPr wrap="square" lIns="0" tIns="0" rIns="0" bIns="0" rtlCol="0" anchor="t"/>
+          <a:lstStyle/>
+          <a:p>
+            <a:pPr indent="0" marL="0">
+              <a:lnSpc>
+                <a:spcPct val="130000"/>
+              </a:lnSpc>
+              <a:buNone/>
+            </a:pPr>
+            <a:r>
+              <a:rPr lang="pt-BR" sz="1300" dirty="0">
+                <a:solidFill>
+                  <a:srgbClr val="E9EEF3"/>
+                </a:solidFill>
+                <a:latin typeface="Courier New" pitchFamily="34" charset="0"/>
+                <a:ea typeface="Courier New" pitchFamily="34" charset="-122"/>
+                <a:cs typeface="Courier New" pitchFamily="34" charset="-120"/>
+              </a:rPr>
+              <a:t>descrever(x) = "valor genérico: $x"</a:t>
+            </a:r>
+            <a:endParaRPr lang="pt-BR" sz="1300" dirty="0"/>
+          </a:p>
+          <a:p>
+            <a:pPr indent="0" marL="0">
+              <a:lnSpc>
+                <a:spcPct val="130000"/>
+              </a:lnSpc>
+              <a:buNone/>
+            </a:pPr>
+            <a:r>
+              <a:rPr lang="pt-BR" sz="1300" dirty="0">
+                <a:solidFill>
+                  <a:srgbClr val="E9EEF3"/>
+                </a:solidFill>
+                <a:latin typeface="Courier New" pitchFamily="34" charset="0"/>
+                <a:ea typeface="Courier New" pitchFamily="34" charset="-122"/>
+                <a:cs typeface="Courier New" pitchFamily="34" charset="-120"/>
+              </a:rPr>
+              <a:t>descrever(x::Number) =</a:t>
+            </a:r>
+            <a:endParaRPr lang="pt-BR" sz="1300" dirty="0"/>
+          </a:p>
+          <a:p>
+            <a:pPr indent="0" marL="0">
+              <a:lnSpc>
+                <a:spcPct val="130000"/>
+              </a:lnSpc>
+              <a:buNone/>
+            </a:pPr>
+            <a:r>
+              <a:rPr lang="pt-BR" sz="1300" dirty="0">
+                <a:solidFill>
+                  <a:srgbClr val="E9EEF3"/>
+                </a:solidFill>
+                <a:latin typeface="Courier New" pitchFamily="34" charset="0"/>
+                <a:ea typeface="Courier New" pitchFamily="34" charset="-122"/>
+                <a:cs typeface="Courier New" pitchFamily="34" charset="-120"/>
+              </a:rPr>
+              <a:t>    "número: $x (o dobro é $(2x))"</a:t>
+            </a:r>
+            <a:endParaRPr lang="pt-BR" sz="1300" dirty="0"/>
+          </a:p>
+        </p:txBody>
+      </p:sp>
+      <p:sp>
+        <p:nvSpPr>
+          <p:cNvPr id="906" name="CaixaTraco"/>
+          <p:cNvSpPr/>
+          <p:nvPr/>
+        </p:nvSpPr>
+        <p:spPr>
+          <a:xfrm>
+            <a:off x="5943600" y="4754880"/>
+            <a:ext cx="5669280" cy="1088136"/>
+          </a:xfrm>
+          <a:prstGeom prst="roundRect">
+            <a:avLst>
+              <a:gd name="adj" fmla="val 8000"/>
+            </a:avLst>
+          </a:prstGeom>
+          <a:solidFill>
+            <a:srgbClr val="EEF3F8"/>
+          </a:solidFill>
+          <a:ln>
+            <a:noFill/>
+          </a:ln>
+        </p:spPr>
+        <p:txBody>
+          <a:bodyPr/>
+          <a:p/>
+        </p:txBody>
+      </p:sp>
+      <p:sp>
+        <p:nvSpPr>
+          <p:cNvPr id="907" name="Traco"/>
+          <p:cNvSpPr/>
+          <p:nvPr/>
+        </p:nvSpPr>
+        <p:spPr>
+          <a:xfrm>
+            <a:off x="6217920" y="4892040"/>
+            <a:ext cx="5120640" cy="813816"/>
+          </a:xfrm>
+          <a:prstGeom prst="rect">
+            <a:avLst/>
+          </a:prstGeom>
+          <a:noFill/>
+          <a:ln/>
+        </p:spPr>
+        <p:txBody>
+          <a:bodyPr wrap="square" lIns="0" tIns="0" rIns="0" bIns="0" rtlCol="0" anchor="t"/>
+          <a:lstStyle/>
+          <a:p>
+            <a:pPr indent="0" marL="0">
+              <a:lnSpc>
+                <a:spcPct val="120000"/>
+              </a:lnSpc>
+              <a:buNone/>
+            </a:pPr>
+            <a:r>
+              <a:rPr lang="pt-BR" sz="1250" b="1" dirty="0">
+                <a:solidFill>
+                  <a:srgbClr val="2C7A8C"/>
+                </a:solidFill>
+                <a:latin typeface="Courier New" pitchFamily="34" charset="0"/>
+                <a:cs typeface="Courier New" pitchFamily="34" charset="-120"/>
+              </a:rPr>
+              <a:t>descrever("texto")</a:t>
+            </a:r>
+            <a:r>
+              <a:rPr lang="pt-BR" sz="1250" dirty="0">
+                <a:solidFill>
+                  <a:srgbClr val="3A4A5C"/>
+                </a:solidFill>
+                <a:latin typeface="Courier New" pitchFamily="34" charset="0"/>
+                <a:cs typeface="Courier New" pitchFamily="34" charset="-120"/>
+              </a:rPr>
+              <a:t>  →  "valor genérico: texto"</a:t>
+            </a:r>
+            <a:endParaRPr lang="pt-BR" sz="1250" dirty="0"/>
+          </a:p>
+          <a:p>
+            <a:pPr indent="0" marL="0">
+              <a:lnSpc>
+                <a:spcPct val="120000"/>
+              </a:lnSpc>
+              <a:buNone/>
+            </a:pPr>
+            <a:r>
+              <a:rPr lang="pt-BR" sz="1250" b="1" dirty="0">
+                <a:solidFill>
+                  <a:srgbClr val="2C7A8C"/>
+                </a:solidFill>
+                <a:latin typeface="Courier New" pitchFamily="34" charset="0"/>
+                <a:cs typeface="Courier New" pitchFamily="34" charset="-120"/>
+              </a:rPr>
+              <a:t>descrever(21)</a:t>
+            </a:r>
+            <a:r>
+              <a:rPr lang="pt-BR" sz="1250" dirty="0">
+                <a:solidFill>
+                  <a:srgbClr val="3A4A5C"/>
+                </a:solidFill>
+                <a:latin typeface="Courier New" pitchFamily="34" charset="0"/>
+                <a:cs typeface="Courier New" pitchFamily="34" charset="-120"/>
+              </a:rPr>
+              <a:t>  →  "número: 21 (o dobro é 42)"</a:t>
+            </a:r>
+            <a:endParaRPr lang="pt-BR" sz="1250" dirty="0"/>
+          </a:p>
+        </p:txBody>
+      </p:sp>
+      <p:sp>
+        <p:nvSpPr>
+          <p:cNvPr id="908" name="CaixaNota"/>
+          <p:cNvSpPr/>
+          <p:nvPr/>
+        </p:nvSpPr>
+        <p:spPr>
+          <a:xfrm>
+            <a:off x="548640" y="4343400"/>
+            <a:ext cx="5120640" cy="1234440"/>
+          </a:xfrm>
+          <a:prstGeom prst="roundRect">
+            <a:avLst>
+              <a:gd name="adj" fmla="val 8000"/>
+            </a:avLst>
+          </a:prstGeom>
+          <a:solidFill>
+            <a:srgbClr val="FCF3E7"/>
+          </a:solidFill>
+          <a:ln w="12700">
+            <a:solidFill>
+              <a:srgbClr val="E8963C"/>
+            </a:solidFill>
+          </a:ln>
+        </p:spPr>
+        <p:txBody>
+          <a:bodyPr/>
+          <a:p/>
+        </p:txBody>
+      </p:sp>
+      <p:sp>
+        <p:nvSpPr>
+          <p:cNvPr id="909" name="Nota"/>
+          <p:cNvSpPr/>
+          <p:nvPr/>
+        </p:nvSpPr>
+        <p:spPr>
+          <a:xfrm>
+            <a:off x="777240" y="4343400"/>
+            <a:ext cx="4663440" cy="1234440"/>
+          </a:xfrm>
+          <a:prstGeom prst="rect">
+            <a:avLst/>
+          </a:prstGeom>
+          <a:noFill/>
+          <a:ln/>
+        </p:spPr>
+        <p:txBody>
+          <a:bodyPr wrap="square" lIns="0" tIns="0" rIns="0" bIns="0" rtlCol="0" anchor="ctr"/>
+          <a:lstStyle/>
+          <a:p>
+            <a:pPr indent="0" marL="0">
+              <a:buNone/>
+            </a:pPr>
+            <a:r>
+              <a:rPr lang="pt-BR" sz="1150" i="1" kern="0" dirty="0">
+                <a:solidFill>
+                  <a:srgbClr val="8A5A17"/>
+                </a:solidFill>
+                <a:latin typeface="Calibri" pitchFamily="34" charset="0"/>
+                <a:ea typeface="Calibri" pitchFamily="34" charset="-122"/>
+                <a:cs typeface="Calibri" pitchFamily="34" charset="-120"/>
+              </a:rPr>
+              <a:t>Mesmo nome, dois comportamentos: despacho múltiplo é Julia decidindo qual método rodar pelo tipo do argumento recebido — não uma condição escrita à mão.</a:t>
+            </a:r>
+            <a:endParaRPr lang="pt-BR" sz="1150" dirty="0"/>
+          </a:p>
+        </p:txBody>
+      </p:sp>
+      <p:sp>
+        <p:nvSpPr>
+          <p:cNvPr id="910" name="Rodape"/>
+          <p:cNvSpPr/>
+          <p:nvPr/>
+        </p:nvSpPr>
+        <p:spPr>
+          <a:xfrm>
+            <a:off x="548640" y="6355080"/>
+            <a:ext cx="7315200" cy="274320"/>
+          </a:xfrm>
+          <a:prstGeom prst="rect">
+            <a:avLst/>
+          </a:prstGeom>
+          <a:noFill/>
+          <a:ln/>
+        </p:spPr>
+        <p:txBody>
+          <a:bodyPr wrap="square" lIns="0" tIns="0" rIns="0" bIns="0" rtlCol="0" anchor="ctr"/>
+          <a:lstStyle/>
+          <a:p>
+            <a:pPr indent="0" marL="0">
+              <a:buNone/>
+            </a:pPr>
+            <a:r>
+              <a:rPr lang="pt-BR" sz="900" kern="0" dirty="0">
+                <a:solidFill>
+                  <a:srgbClr val="9AA5B1"/>
+                </a:solidFill>
+                <a:latin typeface="Calibri" pitchFamily="34" charset="0"/>
+                <a:ea typeface="Calibri" pitchFamily="34" charset="-122"/>
+                <a:cs typeface="Calibri" pitchFamily="34" charset="-120"/>
+              </a:rPr>
+              <a:t>Aula 12 · Ações Ligadas a Categorias</a:t>
+            </a:r>
+            <a:endParaRPr lang="pt-BR" sz="900" dirty="0"/>
+          </a:p>
+        </p:txBody>
+      </p:sp>
+      <p:sp>
+        <p:nvSpPr>
+          <p:cNvPr id="911" name="Pagina"/>
+          <p:cNvSpPr/>
+          <p:nvPr/>
+        </p:nvSpPr>
+        <p:spPr>
+          <a:xfrm>
+            <a:off x="10972800" y="6355080"/>
+            <a:ext cx="731520" cy="274320"/>
+          </a:xfrm>
+          <a:prstGeom prst="rect">
+            <a:avLst/>
+          </a:prstGeom>
+          <a:noFill/>
+          <a:ln/>
+        </p:spPr>
+        <p:txBody>
+          <a:bodyPr wrap="square" lIns="0" tIns="0" rIns="0" bIns="0" rtlCol="0" anchor="ctr"/>
+          <a:lstStyle/>
+          <a:p>
+            <a:pPr algn="r" indent="0" marL="0">
+              <a:buNone/>
+            </a:pPr>
+            <a:r>
+              <a:rPr lang="pt-BR" sz="900" kern="0" dirty="0">
+                <a:solidFill>
+                  <a:srgbClr val="9AA5B1"/>
+                </a:solidFill>
+                <a:latin typeface="Calibri" pitchFamily="34" charset="0"/>
+                <a:ea typeface="Calibri" pitchFamily="34" charset="-122"/>
+                <a:cs typeface="Calibri" pitchFamily="34" charset="-120"/>
+              </a:rPr>
+              <a:t>07</a:t>
+            </a:r>
+            <a:endParaRPr lang="pt-BR" sz="900" dirty="0"/>
           </a:p>
         </p:txBody>
       </p:sp>
